--- a/Kubernetes/Trainer/K8s_TrackA_Trainer_Part2.pptx
+++ b/Kubernetes/Trainer/K8s_TrackA_Trainer_Part2.pptx
@@ -4,6 +4,9 @@
   <p:sldMasterIdLst>
     <p:sldMasterId id="2147483648" r:id="rId1"/>
   </p:sldMasterIdLst>
+  <p:notesMasterIdLst>
+    <p:notesMasterId r:id="rId15"/>
+  </p:notesMasterIdLst>
   <p:sldIdLst>
     <p:sldId id="256" r:id="rId2"/>
     <p:sldId id="257" r:id="rId3"/>
@@ -19,10 +22,7 @@
     <p:sldId id="267" r:id="rId13"/>
     <p:sldId id="268" r:id="rId14"/>
   </p:sldIdLst>
-  <p:notesMasterIdLst>
-    <p:notesMasterId r:id="rId15"/>
-  </p:notesMasterIdLst>
-  <p:sldSz cx="9144000" cy="5143500"/>
+  <p:sldSz cx="9144000" cy="5143500" type="screen16x9"/>
   <p:notesSz cx="5143500" cy="9144000"/>
   <p:defaultTextStyle>
     <a:lvl1pPr marL="0" algn="l" defTabSz="914400" rtl="0" eaLnBrk="1" latinLnBrk="0" hangingPunct="1">
@@ -116,6 +116,11 @@
       </a:defRPr>
     </a:lvl9pPr>
   </p:defaultTextStyle>
+  <p:extLst>
+    <p:ext uri="{EFAFB233-063F-42B5-8137-9DF3F51BA10A}">
+      <p15:sldGuideLst xmlns:p15="http://schemas.microsoft.com/office/powerpoint/2012/main"/>
+    </p:ext>
+  </p:extLst>
 </p:presentation>
 </file>
 
@@ -154,7 +159,7 @@
         <p:spPr>
           <a:xfrm>
             <a:off x="0" y="0"/>
-            <a:ext cx="2971800" cy="458788"/>
+            <a:ext cx="2228850" cy="458788"/>
           </a:xfrm>
           <a:prstGeom prst="rect">
             <a:avLst/>
@@ -168,7 +173,7 @@
             </a:lvl1pPr>
           </a:lstStyle>
           <a:p>
-            <a:endParaRPr lang="en-US"/>
+            <a:endParaRPr lang="en-GB"/>
           </a:p>
         </p:txBody>
       </p:sp>
@@ -184,8 +189,8 @@
         </p:nvSpPr>
         <p:spPr>
           <a:xfrm>
-            <a:off x="3884613" y="0"/>
-            <a:ext cx="2971800" cy="458788"/>
+            <a:off x="2913063" y="0"/>
+            <a:ext cx="2228850" cy="458788"/>
           </a:xfrm>
           <a:prstGeom prst="rect">
             <a:avLst/>
@@ -199,11 +204,10 @@
             </a:lvl1pPr>
           </a:lstStyle>
           <a:p>
-            <a:fld id="{5282F153-3F37-0F45-9E97-73ACFA13230C}" type="datetimeFigureOut">
-              <a:rPr lang="en-US"/>
-              <a:t>7/23/19</a:t>
+            <a:fld id="{4992F5B6-7803-4D00-8A49-AE80BABC2E65}" type="datetimeFigureOut">
+              <a:t>14/07/2026</a:t>
             </a:fld>
-            <a:endParaRPr lang="en-US"/>
+            <a:endParaRPr lang="en-GB"/>
           </a:p>
         </p:txBody>
       </p:sp>
@@ -219,7 +223,7 @@
         </p:nvSpPr>
         <p:spPr>
           <a:xfrm>
-            <a:off x="685800" y="1143000"/>
+            <a:off x="-171450" y="1143000"/>
             <a:ext cx="5486400" cy="3086100"/>
           </a:xfrm>
           <a:prstGeom prst="rect">
@@ -236,7 +240,7 @@
           <a:bodyPr vert="horz" lIns="91440" tIns="45720" rIns="91440" bIns="45720" rtlCol="0" anchor="ctr"/>
           <a:lstStyle/>
           <a:p>
-            <a:endParaRPr lang="en-US"/>
+            <a:endParaRPr lang="en-GB"/>
           </a:p>
         </p:txBody>
       </p:sp>
@@ -252,8 +256,8 @@
         </p:nvSpPr>
         <p:spPr>
           <a:xfrm>
-            <a:off x="685800" y="4400550"/>
-            <a:ext cx="5486400" cy="3600450"/>
+            <a:off x="514350" y="4400550"/>
+            <a:ext cx="4114800" cy="3600450"/>
           </a:xfrm>
           <a:prstGeom prst="rect">
             <a:avLst/>
@@ -265,35 +269,35 @@
           <a:p>
             <a:pPr lvl="0"/>
             <a:r>
-              <a:rPr lang="en-US"/>
+              <a:rPr lang="en-GB"/>
               <a:t>Click to edit Master text styles</a:t>
             </a:r>
           </a:p>
           <a:p>
             <a:pPr lvl="1"/>
             <a:r>
-              <a:rPr lang="en-US"/>
+              <a:rPr lang="en-GB"/>
               <a:t>Second level</a:t>
             </a:r>
           </a:p>
           <a:p>
             <a:pPr lvl="2"/>
             <a:r>
-              <a:rPr lang="en-US"/>
+              <a:rPr lang="en-GB"/>
               <a:t>Third level</a:t>
             </a:r>
           </a:p>
           <a:p>
             <a:pPr lvl="3"/>
             <a:r>
-              <a:rPr lang="en-US"/>
+              <a:rPr lang="en-GB"/>
               <a:t>Fourth level</a:t>
             </a:r>
           </a:p>
           <a:p>
             <a:pPr lvl="4"/>
             <a:r>
-              <a:rPr lang="en-US"/>
+              <a:rPr lang="en-GB"/>
               <a:t>Fifth level</a:t>
             </a:r>
           </a:p>
@@ -312,7 +316,7 @@
         <p:spPr>
           <a:xfrm>
             <a:off x="0" y="8685213"/>
-            <a:ext cx="2971800" cy="458787"/>
+            <a:ext cx="2228850" cy="458787"/>
           </a:xfrm>
           <a:prstGeom prst="rect">
             <a:avLst/>
@@ -326,7 +330,7 @@
             </a:lvl1pPr>
           </a:lstStyle>
           <a:p>
-            <a:endParaRPr lang="en-US"/>
+            <a:endParaRPr lang="en-GB"/>
           </a:p>
         </p:txBody>
       </p:sp>
@@ -342,8 +346,8 @@
         </p:nvSpPr>
         <p:spPr>
           <a:xfrm>
-            <a:off x="3884613" y="8685213"/>
-            <a:ext cx="2971800" cy="458787"/>
+            <a:off x="2913063" y="8685213"/>
+            <a:ext cx="2228850" cy="458787"/>
           </a:xfrm>
           <a:prstGeom prst="rect">
             <a:avLst/>
@@ -357,18 +361,17 @@
             </a:lvl1pPr>
           </a:lstStyle>
           <a:p>
-            <a:fld id="{CE5E9CC1-C706-0F49-92D6-E571CC5EEA8F}" type="slidenum">
-              <a:rPr lang="en-US"/>
+            <a:fld id="{161676C9-CBDD-4272-A9C7-0A16E2E2B824}" type="slidenum">
               <a:t>‹#›</a:t>
             </a:fld>
-            <a:endParaRPr lang="en-US"/>
+            <a:endParaRPr lang="en-GB"/>
           </a:p>
         </p:txBody>
       </p:sp>
     </p:spTree>
     <p:extLst>
       <p:ext uri="{BB962C8B-B14F-4D97-AF65-F5344CB8AC3E}">
-        <p14:creationId xmlns:p14="http://schemas.microsoft.com/office/powerpoint/2010/main" val="1024086991"/>
+        <p14:creationId xmlns:p14="http://schemas.microsoft.com/office/powerpoint/2010/main" val="3461756520"/>
       </p:ext>
     </p:extLst>
   </p:cSld>
@@ -517,7 +520,6 @@
               <a:t>TIMING: 10:22 (after break)
 Say: 'Welcome back. Your break task was to verify kubectl get nodes works. If anyone is still stuck, let's fix it now before we continue — everything else today requires a working cluster.'</a:t>
             </a:r>
-            <a:endParaRPr lang="en-US" dirty="0"/>
           </a:p>
         </p:txBody>
       </p:sp>
@@ -616,7 +618,6 @@
 nodePort: 30080 → port on the Node for external access
 For minikube specifically: minikube service &lt;name&gt; --url gives you the right address to use in the browser since minikube uses a VM with its own IP.</a:t>
             </a:r>
-            <a:endParaRPr lang="en-US" dirty="0"/>
           </a:p>
         </p:txBody>
       </p:sp>
@@ -710,7 +711,6 @@
 During lunch: ensure cluster is still running with kubectl get nodes.
 Prepare the lab YAML files if not already done.</a:t>
             </a:r>
-            <a:endParaRPr lang="en-US" dirty="0"/>
           </a:p>
         </p:txBody>
       </p:sp>
@@ -800,7 +800,6 @@
 Quick close before lunch. Tell the no-label-match story:
 'You deploy your app. kubectl get pods shows everything Running. But the website is down. You check the Service — looks fine. You check the Deployment — looks fine. After 20 minutes you spot it: the Service selector says app: my-nginx but the Deployment label says app: nginx. One word difference. The Service found zero Pods and was sending traffic nowhere. No error anywhere. This is one of the most common Kubernetes mistakes.'</a:t>
             </a:r>
-            <a:endParaRPr lang="en-US" dirty="0"/>
           </a:p>
         </p:txBody>
       </p:sp>
@@ -889,7 +888,6 @@
               <a:t>TIMING: 12:00
 Say: 'After lunch we do two things: learn the kubectl commands you need every day, then spend 3 hours building and deploying a real application. Everything you deploy in the lab uses what you learned this morning.'</a:t>
             </a:r>
-            <a:endParaRPr lang="en-US" dirty="0"/>
           </a:p>
         </p:txBody>
       </p:sp>
@@ -981,7 +979,6 @@
 One IP per Pod: 'Each Pod gets its own IP inside the cluster. Containers within the same Pod communicate via localhost — as if they are on the same machine.'
 Common question: 'Can I SSH into a Pod?' Answer: Yes — kubectl exec -it &lt;pod-name&gt; -- bash. Show this in the lab.</a:t>
             </a:r>
-            <a:endParaRPr lang="en-US" dirty="0"/>
           </a:p>
         </p:txBody>
       </p:sp>
@@ -1081,7 +1078,6 @@
 Then: kubectl get pods → pod is gone permanently.
 Point: 'This is why we don't manage Pods directly. Next we look at Deployments — which recreate the Pod automatically if it gets deleted.'</a:t>
             </a:r>
-            <a:endParaRPr lang="en-US" dirty="0"/>
           </a:p>
         </p:txBody>
       </p:sp>
@@ -1170,7 +1166,6 @@
               <a:t>TIMING: 10:46
 Say: 'You saw that if you delete a Pod manually, it is gone. A Deployment solves this — it continuously watches how many Pods should be running and makes sure that number is always maintained. Delete one Pod — Deployment creates a new one within seconds.'</a:t>
             </a:r>
-            <a:endParaRPr lang="en-US" dirty="0"/>
           </a:p>
         </p:txBody>
       </p:sp>
@@ -1265,7 +1260,6 @@
 4. Wait 5 seconds, run again   (3 pods running again)
 Say: 'That Pod was replaced automatically in under 10 seconds. Nobody was paged. Nobody woke up. The Deployment noticed one Pod was missing and created a replacement immediately. This is production-grade reliability.'</a:t>
             </a:r>
-            <a:endParaRPr lang="en-US" dirty="0"/>
           </a:p>
         </p:txBody>
       </p:sp>
@@ -1365,7 +1359,6 @@
 kubectl scale deployment nginx-deployment --replicas=2
 kubectl get pods   (back to 2, extras terminated)</a:t>
             </a:r>
-            <a:endParaRPr lang="en-US" dirty="0"/>
           </a:p>
         </p:txBody>
       </p:sp>
@@ -1466,7 +1459,6 @@
 kubectl get pods   (back to working version)
 Say: 'You just deployed a bad version and rolled back in under 30 seconds. In traditional deployments, that rollback might take 20 minutes and a 3am phone call.'</a:t>
             </a:r>
-            <a:endParaRPr lang="en-US" dirty="0"/>
           </a:p>
         </p:txBody>
       </p:sp>
@@ -1555,7 +1547,6 @@
               <a:t>TIMING: 11:22
 Say: 'You have Pods running and Deployments keeping them healthy. But right now, nobody can reach them from outside the cluster. Pods have internal IPs that change every time they restart. A Service gives your application a stable address and handles load balancing automatically.'</a:t>
             </a:r>
-            <a:endParaRPr lang="en-US" dirty="0"/>
           </a:p>
         </p:txBody>
       </p:sp>
@@ -1648,7 +1639,6 @@
 ClusterIP is the default and most common. Most services inside a cluster just need ClusterIP — they communicate with each other internally.
 LoadBalancer: point out that on AWS/GCP/Azure, this automatically provisions an AWS ELB or GCP Load Balancer and gives you a real public IP. Very powerful with one YAML file.</a:t>
             </a:r>
-            <a:endParaRPr lang="en-US" dirty="0"/>
           </a:p>
         </p:txBody>
       </p:sp>
@@ -1721,6 +1711,11 @@
 <file path=ppt/slideMasters/slideMaster1.xml><?xml version="1.0" encoding="utf-8"?>
 <p:sldMaster xmlns:a="http://schemas.openxmlformats.org/drawingml/2006/main" xmlns:r="http://schemas.openxmlformats.org/officeDocument/2006/relationships" xmlns:p="http://schemas.openxmlformats.org/presentationml/2006/main">
   <p:cSld>
+    <p:bg>
+      <p:bgRef idx="1001">
+        <a:schemeClr val="bg1"/>
+      </p:bgRef>
+    </p:bg>
     <p:spTree>
       <p:nvGrpSpPr>
         <p:cNvPr id="1" name=""/>
@@ -2003,6 +1998,7 @@
         <a:solidFill>
           <a:srgbClr val="0F172A"/>
         </a:solidFill>
+        <a:effectLst/>
       </p:bgPr>
     </p:bg>
     <p:spTree>
@@ -2094,11 +2090,11 @@
           <a:bodyPr wrap="square" lIns="0" tIns="0" rIns="0" bIns="0" rtlCol="0" anchor="ctr"/>
           <a:lstStyle/>
           <a:p>
-            <a:pPr indent="0" marL="0">
-              <a:buNone/>
-            </a:pPr>
-            <a:r>
-              <a:rPr lang="en-US" sz="1200" b="1" spc="400" kern="0" dirty="0">
+            <a:pPr marL="0" indent="0">
+              <a:buNone/>
+            </a:pPr>
+            <a:r>
+              <a:rPr lang="en-US" sz="1200" b="1" kern="0" spc="400" dirty="0">
                 <a:solidFill>
                   <a:srgbClr val="326CE5"/>
                 </a:solidFill>
@@ -2133,7 +2129,7 @@
           <a:bodyPr wrap="square" lIns="0" tIns="0" rIns="0" bIns="0" rtlCol="0" anchor="ctr"/>
           <a:lstStyle/>
           <a:p>
-            <a:pPr indent="0" marL="0">
+            <a:pPr marL="0" indent="0">
               <a:buNone/>
             </a:pPr>
             <a:r>
@@ -2172,7 +2168,7 @@
           <a:bodyPr wrap="square" lIns="0" tIns="0" rIns="0" bIns="0" rtlCol="0" anchor="ctr"/>
           <a:lstStyle/>
           <a:p>
-            <a:pPr indent="0" marL="0">
+            <a:pPr marL="0" indent="0">
               <a:buNone/>
             </a:pPr>
             <a:r>
@@ -2206,6 +2202,7 @@
         <a:solidFill>
           <a:srgbClr val="FFFFFF"/>
         </a:solidFill>
+        <a:effectLst/>
       </p:bgPr>
     </p:bg>
     <p:spTree>
@@ -2268,7 +2265,7 @@
           <a:bodyPr wrap="square" lIns="0" tIns="0" rIns="0" bIns="0" rtlCol="0" anchor="ctr"/>
           <a:lstStyle/>
           <a:p>
-            <a:pPr indent="0" marL="0">
+            <a:pPr marL="0" indent="0">
               <a:buNone/>
             </a:pPr>
             <a:r>
@@ -2334,7 +2331,7 @@
           <a:bodyPr wrap="square" lIns="0" tIns="0" rIns="0" bIns="0" rtlCol="0" anchor="ctr"/>
           <a:lstStyle/>
           <a:p>
-            <a:pPr algn="ctr" indent="0" marL="0">
+            <a:pPr marL="0" indent="0" algn="ctr">
               <a:buNone/>
             </a:pPr>
             <a:r>
@@ -2378,7 +2375,7 @@
             <a:prstDash val="solid"/>
           </a:ln>
           <a:effectLst>
-            <a:outerShdw sx="100000" sy="100000" kx="0" ky="0" algn="bl" rotWithShape="0" blurRad="101600" dist="38100" dir="2700000">
+            <a:outerShdw blurRad="101600" dist="38100" dir="2700000" algn="bl" rotWithShape="0">
               <a:srgbClr val="000000">
                 <a:alpha val="12000"/>
               </a:srgbClr>
@@ -2407,7 +2404,7 @@
           <a:bodyPr wrap="square" lIns="0" tIns="0" rIns="0" bIns="0" rtlCol="0" anchor="ctr"/>
           <a:lstStyle/>
           <a:p>
-            <a:pPr indent="0" marL="0">
+            <a:pPr marL="0" indent="0">
               <a:buNone/>
             </a:pPr>
             <a:r>
@@ -2446,7 +2443,7 @@
           <a:bodyPr wrap="square" lIns="0" tIns="0" rIns="0" bIns="0" rtlCol="0" anchor="ctr"/>
           <a:lstStyle/>
           <a:p>
-            <a:pPr indent="0" marL="0">
+            <a:pPr marL="0" indent="0">
               <a:buNone/>
             </a:pPr>
             <a:r>
@@ -2485,7 +2482,7 @@
           <a:bodyPr wrap="square" lIns="0" tIns="0" rIns="0" bIns="0" rtlCol="0" anchor="ctr"/>
           <a:lstStyle/>
           <a:p>
-            <a:pPr indent="0" marL="0">
+            <a:pPr marL="0" indent="0">
               <a:buNone/>
             </a:pPr>
             <a:r>
@@ -2524,7 +2521,7 @@
           <a:bodyPr wrap="square" lIns="0" tIns="0" rIns="0" bIns="0" rtlCol="0" anchor="ctr"/>
           <a:lstStyle/>
           <a:p>
-            <a:pPr indent="0" marL="0">
+            <a:pPr marL="0" indent="0">
               <a:buNone/>
             </a:pPr>
             <a:r>
@@ -2563,7 +2560,7 @@
           <a:bodyPr wrap="square" lIns="0" tIns="0" rIns="0" bIns="0" rtlCol="0" anchor="ctr"/>
           <a:lstStyle/>
           <a:p>
-            <a:pPr indent="0" marL="0">
+            <a:pPr marL="0" indent="0">
               <a:buNone/>
             </a:pPr>
             <a:r>
@@ -2602,7 +2599,7 @@
           <a:bodyPr wrap="square" lIns="0" tIns="0" rIns="0" bIns="0" rtlCol="0" anchor="ctr"/>
           <a:lstStyle/>
           <a:p>
-            <a:pPr indent="0" marL="0">
+            <a:pPr marL="0" indent="0">
               <a:buNone/>
             </a:pPr>
             <a:r>
@@ -2641,7 +2638,7 @@
           <a:bodyPr wrap="square" lIns="0" tIns="0" rIns="0" bIns="0" rtlCol="0" anchor="ctr"/>
           <a:lstStyle/>
           <a:p>
-            <a:pPr indent="0" marL="0">
+            <a:pPr marL="0" indent="0">
               <a:buNone/>
             </a:pPr>
             <a:r>
@@ -2680,7 +2677,7 @@
           <a:bodyPr wrap="square" lIns="0" tIns="0" rIns="0" bIns="0" rtlCol="0" anchor="ctr"/>
           <a:lstStyle/>
           <a:p>
-            <a:pPr indent="0" marL="0">
+            <a:pPr marL="0" indent="0">
               <a:buNone/>
             </a:pPr>
             <a:r>
@@ -2719,7 +2716,7 @@
           <a:bodyPr wrap="square" lIns="0" tIns="0" rIns="0" bIns="0" rtlCol="0" anchor="ctr"/>
           <a:lstStyle/>
           <a:p>
-            <a:pPr indent="0" marL="0">
+            <a:pPr marL="0" indent="0">
               <a:buNone/>
             </a:pPr>
             <a:r>
@@ -2758,7 +2755,7 @@
           <a:bodyPr wrap="square" lIns="0" tIns="0" rIns="0" bIns="0" rtlCol="0" anchor="ctr"/>
           <a:lstStyle/>
           <a:p>
-            <a:pPr indent="0" marL="0">
+            <a:pPr marL="0" indent="0">
               <a:buNone/>
             </a:pPr>
             <a:r>
@@ -2797,7 +2794,7 @@
           <a:bodyPr wrap="square" lIns="0" tIns="0" rIns="0" bIns="0" rtlCol="0" anchor="ctr"/>
           <a:lstStyle/>
           <a:p>
-            <a:pPr indent="0" marL="0">
+            <a:pPr marL="0" indent="0">
               <a:buNone/>
             </a:pPr>
             <a:r>
@@ -2836,7 +2833,7 @@
           <a:bodyPr wrap="square" lIns="0" tIns="0" rIns="0" bIns="0" rtlCol="0" anchor="ctr"/>
           <a:lstStyle/>
           <a:p>
-            <a:pPr indent="0" marL="0">
+            <a:pPr marL="0" indent="0">
               <a:buNone/>
             </a:pPr>
             <a:r>
@@ -2875,7 +2872,7 @@
           <a:bodyPr wrap="square" lIns="0" tIns="0" rIns="0" bIns="0" rtlCol="0" anchor="ctr"/>
           <a:lstStyle/>
           <a:p>
-            <a:pPr indent="0" marL="0">
+            <a:pPr marL="0" indent="0">
               <a:buNone/>
             </a:pPr>
             <a:r>
@@ -2914,7 +2911,7 @@
           <a:bodyPr wrap="square" lIns="0" tIns="0" rIns="0" bIns="0" rtlCol="0" anchor="ctr"/>
           <a:lstStyle/>
           <a:p>
-            <a:pPr indent="0" marL="0">
+            <a:pPr marL="0" indent="0">
               <a:buNone/>
             </a:pPr>
             <a:r>
@@ -2953,7 +2950,7 @@
           <a:bodyPr wrap="square" lIns="0" tIns="0" rIns="0" bIns="0" rtlCol="0" anchor="ctr"/>
           <a:lstStyle/>
           <a:p>
-            <a:pPr indent="0" marL="0">
+            <a:pPr marL="0" indent="0">
               <a:buNone/>
             </a:pPr>
             <a:r>
@@ -3017,7 +3014,7 @@
           <a:bodyPr wrap="square" lIns="0" tIns="0" rIns="0" bIns="0" rtlCol="0" anchor="ctr"/>
           <a:lstStyle/>
           <a:p>
-            <a:pPr algn="ctr" indent="0" marL="0">
+            <a:pPr marL="0" indent="0" algn="ctr">
               <a:buNone/>
             </a:pPr>
             <a:r>
@@ -3056,7 +3053,7 @@
           <a:bodyPr wrap="square" lIns="0" tIns="0" rIns="0" bIns="0" rtlCol="0" anchor="ctr"/>
           <a:lstStyle/>
           <a:p>
-            <a:pPr indent="0" marL="0">
+            <a:pPr marL="0" indent="0">
               <a:buNone/>
             </a:pPr>
             <a:r>
@@ -3095,7 +3092,7 @@
           <a:bodyPr wrap="square" lIns="0" tIns="0" rIns="0" bIns="0" rtlCol="0" anchor="ctr"/>
           <a:lstStyle/>
           <a:p>
-            <a:pPr indent="0" marL="0">
+            <a:pPr marL="0" indent="0">
               <a:buNone/>
             </a:pPr>
             <a:r>
@@ -3159,7 +3156,7 @@
           <a:bodyPr wrap="square" lIns="0" tIns="0" rIns="0" bIns="0" rtlCol="0" anchor="ctr"/>
           <a:lstStyle/>
           <a:p>
-            <a:pPr algn="ctr" indent="0" marL="0">
+            <a:pPr marL="0" indent="0" algn="ctr">
               <a:buNone/>
             </a:pPr>
             <a:r>
@@ -3198,7 +3195,7 @@
           <a:bodyPr wrap="square" lIns="0" tIns="0" rIns="0" bIns="0" rtlCol="0" anchor="ctr"/>
           <a:lstStyle/>
           <a:p>
-            <a:pPr indent="0" marL="0">
+            <a:pPr marL="0" indent="0">
               <a:buNone/>
             </a:pPr>
             <a:r>
@@ -3237,7 +3234,7 @@
           <a:bodyPr wrap="square" lIns="0" tIns="0" rIns="0" bIns="0" rtlCol="0" anchor="ctr"/>
           <a:lstStyle/>
           <a:p>
-            <a:pPr indent="0" marL="0">
+            <a:pPr marL="0" indent="0">
               <a:buNone/>
             </a:pPr>
             <a:r>
@@ -3301,7 +3298,7 @@
           <a:bodyPr wrap="square" lIns="0" tIns="0" rIns="0" bIns="0" rtlCol="0" anchor="ctr"/>
           <a:lstStyle/>
           <a:p>
-            <a:pPr algn="ctr" indent="0" marL="0">
+            <a:pPr marL="0" indent="0" algn="ctr">
               <a:buNone/>
             </a:pPr>
             <a:r>
@@ -3340,7 +3337,7 @@
           <a:bodyPr wrap="square" lIns="0" tIns="0" rIns="0" bIns="0" rtlCol="0" anchor="ctr"/>
           <a:lstStyle/>
           <a:p>
-            <a:pPr indent="0" marL="0">
+            <a:pPr marL="0" indent="0">
               <a:buNone/>
             </a:pPr>
             <a:r>
@@ -3379,7 +3376,7 @@
           <a:bodyPr wrap="square" lIns="0" tIns="0" rIns="0" bIns="0" rtlCol="0" anchor="ctr"/>
           <a:lstStyle/>
           <a:p>
-            <a:pPr indent="0" marL="0">
+            <a:pPr marL="0" indent="0">
               <a:buNone/>
             </a:pPr>
             <a:r>
@@ -3443,7 +3440,7 @@
           <a:bodyPr wrap="square" lIns="0" tIns="0" rIns="0" bIns="0" rtlCol="0" anchor="ctr"/>
           <a:lstStyle/>
           <a:p>
-            <a:pPr algn="ctr" indent="0" marL="0">
+            <a:pPr marL="0" indent="0" algn="ctr">
               <a:buNone/>
             </a:pPr>
             <a:r>
@@ -3482,7 +3479,7 @@
           <a:bodyPr wrap="square" lIns="0" tIns="0" rIns="0" bIns="0" rtlCol="0" anchor="ctr"/>
           <a:lstStyle/>
           <a:p>
-            <a:pPr indent="0" marL="0">
+            <a:pPr marL="0" indent="0">
               <a:buNone/>
             </a:pPr>
             <a:r>
@@ -3521,7 +3518,7 @@
           <a:bodyPr wrap="square" lIns="0" tIns="0" rIns="0" bIns="0" rtlCol="0" anchor="ctr"/>
           <a:lstStyle/>
           <a:p>
-            <a:pPr indent="0" marL="0">
+            <a:pPr marL="0" indent="0">
               <a:buNone/>
             </a:pPr>
             <a:r>
@@ -3585,7 +3582,7 @@
           <a:bodyPr wrap="square" lIns="0" tIns="0" rIns="0" bIns="0" rtlCol="0" anchor="ctr"/>
           <a:lstStyle/>
           <a:p>
-            <a:pPr algn="ctr" indent="0" marL="0">
+            <a:pPr marL="0" indent="0" algn="ctr">
               <a:buNone/>
             </a:pPr>
             <a:r>
@@ -3624,7 +3621,7 @@
           <a:bodyPr wrap="square" lIns="0" tIns="0" rIns="0" bIns="0" rtlCol="0" anchor="ctr"/>
           <a:lstStyle/>
           <a:p>
-            <a:pPr indent="0" marL="0">
+            <a:pPr marL="0" indent="0">
               <a:buNone/>
             </a:pPr>
             <a:r>
@@ -3663,7 +3660,7 @@
           <a:bodyPr wrap="square" lIns="0" tIns="0" rIns="0" bIns="0" rtlCol="0" anchor="ctr"/>
           <a:lstStyle/>
           <a:p>
-            <a:pPr indent="0" marL="0">
+            <a:pPr marL="0" indent="0">
               <a:buNone/>
             </a:pPr>
             <a:r>
@@ -3727,7 +3724,7 @@
           <a:bodyPr wrap="square" lIns="0" tIns="0" rIns="0" bIns="0" rtlCol="0" anchor="ctr"/>
           <a:lstStyle/>
           <a:p>
-            <a:pPr algn="ctr" indent="0" marL="0">
+            <a:pPr marL="0" indent="0" algn="ctr">
               <a:buNone/>
             </a:pPr>
             <a:r>
@@ -3766,7 +3763,7 @@
           <a:bodyPr wrap="square" lIns="0" tIns="0" rIns="0" bIns="0" rtlCol="0" anchor="ctr"/>
           <a:lstStyle/>
           <a:p>
-            <a:pPr indent="0" marL="0">
+            <a:pPr marL="0" indent="0">
               <a:buNone/>
             </a:pPr>
             <a:r>
@@ -3805,7 +3802,7 @@
           <a:bodyPr wrap="square" lIns="0" tIns="0" rIns="0" bIns="0" rtlCol="0" anchor="ctr"/>
           <a:lstStyle/>
           <a:p>
-            <a:pPr indent="0" marL="0">
+            <a:pPr marL="0" indent="0">
               <a:buNone/>
             </a:pPr>
             <a:r>
@@ -3869,7 +3866,7 @@
           <a:bodyPr wrap="square" lIns="0" tIns="0" rIns="0" bIns="0" rtlCol="0" anchor="ctr"/>
           <a:lstStyle/>
           <a:p>
-            <a:pPr algn="ctr" indent="0" marL="0">
+            <a:pPr marL="0" indent="0" algn="ctr">
               <a:buNone/>
             </a:pPr>
             <a:r>
@@ -3903,6 +3900,7 @@
         <a:solidFill>
           <a:srgbClr val="FFFFFF"/>
         </a:solidFill>
+        <a:effectLst/>
       </p:bgPr>
     </p:bg>
     <p:spTree>
@@ -3965,7 +3963,7 @@
           <a:bodyPr wrap="square" lIns="0" tIns="0" rIns="0" bIns="0" rtlCol="0" anchor="ctr"/>
           <a:lstStyle/>
           <a:p>
-            <a:pPr indent="0" marL="0">
+            <a:pPr marL="0" indent="0">
               <a:buNone/>
             </a:pPr>
             <a:r>
@@ -4031,7 +4029,7 @@
           <a:bodyPr wrap="square" lIns="0" tIns="0" rIns="0" bIns="0" rtlCol="0" anchor="ctr"/>
           <a:lstStyle/>
           <a:p>
-            <a:pPr algn="ctr" indent="0" marL="0">
+            <a:pPr marL="0" indent="0" algn="ctr">
               <a:buNone/>
             </a:pPr>
             <a:r>
@@ -4075,7 +4073,7 @@
             <a:prstDash val="solid"/>
           </a:ln>
           <a:effectLst>
-            <a:outerShdw sx="100000" sy="100000" kx="0" ky="0" algn="bl" rotWithShape="0" blurRad="101600" dist="38100" dir="2700000">
+            <a:outerShdw blurRad="101600" dist="38100" dir="2700000" algn="bl" rotWithShape="0">
               <a:srgbClr val="000000">
                 <a:alpha val="12000"/>
               </a:srgbClr>
@@ -4104,7 +4102,7 @@
           <a:bodyPr wrap="square" lIns="0" tIns="0" rIns="0" bIns="0" rtlCol="0" anchor="ctr"/>
           <a:lstStyle/>
           <a:p>
-            <a:pPr indent="0" marL="0">
+            <a:pPr marL="0" indent="0">
               <a:buNone/>
             </a:pPr>
             <a:r>
@@ -4148,7 +4146,7 @@
             <a:prstDash val="solid"/>
           </a:ln>
           <a:effectLst>
-            <a:outerShdw sx="100000" sy="100000" kx="0" ky="0" algn="bl" rotWithShape="0" blurRad="101600" dist="38100" dir="2700000">
+            <a:outerShdw blurRad="101600" dist="38100" dir="2700000" algn="bl" rotWithShape="0">
               <a:srgbClr val="000000">
                 <a:alpha val="12000"/>
               </a:srgbClr>
@@ -4204,7 +4202,7 @@
           <a:bodyPr wrap="square" lIns="0" tIns="0" rIns="0" bIns="0" rtlCol="0" anchor="ctr"/>
           <a:lstStyle/>
           <a:p>
-            <a:pPr algn="ctr" indent="0" marL="0">
+            <a:pPr marL="0" indent="0" algn="ctr">
               <a:buNone/>
             </a:pPr>
             <a:r>
@@ -4248,7 +4246,7 @@
             <a:prstDash val="solid"/>
           </a:ln>
           <a:effectLst>
-            <a:outerShdw sx="100000" sy="100000" kx="0" ky="0" algn="bl" rotWithShape="0" blurRad="101600" dist="38100" dir="2700000">
+            <a:outerShdw blurRad="101600" dist="38100" dir="2700000" algn="bl" rotWithShape="0">
               <a:srgbClr val="000000">
                 <a:alpha val="12000"/>
               </a:srgbClr>
@@ -4277,7 +4275,7 @@
           <a:bodyPr wrap="square" lIns="0" tIns="0" rIns="0" bIns="0" rtlCol="0" anchor="ctr"/>
           <a:lstStyle/>
           <a:p>
-            <a:pPr indent="0" marL="0">
+            <a:pPr marL="0" indent="0">
               <a:buNone/>
             </a:pPr>
             <a:r>
@@ -4316,7 +4314,7 @@
           <a:bodyPr wrap="square" lIns="0" tIns="0" rIns="0" bIns="0" rtlCol="0" anchor="ctr"/>
           <a:lstStyle/>
           <a:p>
-            <a:pPr indent="0" marL="0">
+            <a:pPr marL="0" indent="0">
               <a:buNone/>
             </a:pPr>
             <a:r>
@@ -4355,7 +4353,7 @@
           <a:bodyPr wrap="square" lIns="0" tIns="0" rIns="0" bIns="0" rtlCol="0" anchor="ctr"/>
           <a:lstStyle/>
           <a:p>
-            <a:pPr indent="0" marL="0">
+            <a:pPr marL="0" indent="0">
               <a:buNone/>
             </a:pPr>
             <a:r>
@@ -4394,7 +4392,7 @@
           <a:bodyPr wrap="square" lIns="0" tIns="0" rIns="0" bIns="0" rtlCol="0" anchor="ctr"/>
           <a:lstStyle/>
           <a:p>
-            <a:pPr indent="0" marL="0">
+            <a:pPr marL="0" indent="0">
               <a:buNone/>
             </a:pPr>
             <a:endParaRPr lang="en-US" sz="900" dirty="0"/>
@@ -4422,7 +4420,7 @@
           <a:bodyPr wrap="square" lIns="0" tIns="0" rIns="0" bIns="0" rtlCol="0" anchor="ctr"/>
           <a:lstStyle/>
           <a:p>
-            <a:pPr indent="0" marL="0">
+            <a:pPr marL="0" indent="0">
               <a:buNone/>
             </a:pPr>
             <a:r>
@@ -4461,7 +4459,7 @@
           <a:bodyPr wrap="square" lIns="0" tIns="0" rIns="0" bIns="0" rtlCol="0" anchor="ctr"/>
           <a:lstStyle/>
           <a:p>
-            <a:pPr indent="0" marL="0">
+            <a:pPr marL="0" indent="0">
               <a:buNone/>
             </a:pPr>
             <a:r>
@@ -4500,7 +4498,7 @@
           <a:bodyPr wrap="square" lIns="0" tIns="0" rIns="0" bIns="0" rtlCol="0" anchor="ctr"/>
           <a:lstStyle/>
           <a:p>
-            <a:pPr indent="0" marL="0">
+            <a:pPr marL="0" indent="0">
               <a:buNone/>
             </a:pPr>
             <a:r>
@@ -4539,7 +4537,7 @@
           <a:bodyPr wrap="square" lIns="0" tIns="0" rIns="0" bIns="0" rtlCol="0" anchor="ctr"/>
           <a:lstStyle/>
           <a:p>
-            <a:pPr indent="0" marL="0">
+            <a:pPr marL="0" indent="0">
               <a:buNone/>
             </a:pPr>
             <a:r>
@@ -4578,7 +4576,7 @@
           <a:bodyPr wrap="square" lIns="0" tIns="0" rIns="0" bIns="0" rtlCol="0" anchor="ctr"/>
           <a:lstStyle/>
           <a:p>
-            <a:pPr algn="ctr" indent="0" marL="0">
+            <a:pPr marL="0" indent="0" algn="ctr">
               <a:buNone/>
             </a:pPr>
             <a:r>
@@ -4619,7 +4617,7 @@
             <a:prstDash val="solid"/>
           </a:ln>
           <a:effectLst>
-            <a:outerShdw sx="100000" sy="100000" kx="0" ky="0" algn="bl" rotWithShape="0" blurRad="101600" dist="38100" dir="2700000">
+            <a:outerShdw blurRad="101600" dist="38100" dir="2700000" algn="bl" rotWithShape="0">
               <a:srgbClr val="000000">
                 <a:alpha val="12000"/>
               </a:srgbClr>
@@ -4675,7 +4673,7 @@
           <a:bodyPr wrap="square" lIns="0" tIns="0" rIns="0" bIns="0" rtlCol="0" anchor="ctr"/>
           <a:lstStyle/>
           <a:p>
-            <a:pPr algn="ctr" indent="0" marL="0">
+            <a:pPr marL="0" indent="0" algn="ctr">
               <a:buNone/>
             </a:pPr>
             <a:r>
@@ -4719,7 +4717,7 @@
             <a:prstDash val="solid"/>
           </a:ln>
           <a:effectLst>
-            <a:outerShdw sx="100000" sy="100000" kx="0" ky="0" algn="bl" rotWithShape="0" blurRad="101600" dist="38100" dir="2700000">
+            <a:outerShdw blurRad="101600" dist="38100" dir="2700000" algn="bl" rotWithShape="0">
               <a:srgbClr val="000000">
                 <a:alpha val="12000"/>
               </a:srgbClr>
@@ -4748,7 +4746,7 @@
           <a:bodyPr wrap="square" lIns="0" tIns="0" rIns="0" bIns="0" rtlCol="0" anchor="ctr"/>
           <a:lstStyle/>
           <a:p>
-            <a:pPr indent="0" marL="0">
+            <a:pPr marL="0" indent="0">
               <a:buNone/>
             </a:pPr>
             <a:r>
@@ -4787,7 +4785,7 @@
           <a:bodyPr wrap="square" lIns="0" tIns="0" rIns="0" bIns="0" rtlCol="0" anchor="ctr"/>
           <a:lstStyle/>
           <a:p>
-            <a:pPr indent="0" marL="0">
+            <a:pPr marL="0" indent="0">
               <a:buNone/>
             </a:pPr>
             <a:r>
@@ -4826,7 +4824,7 @@
           <a:bodyPr wrap="square" lIns="0" tIns="0" rIns="0" bIns="0" rtlCol="0" anchor="ctr"/>
           <a:lstStyle/>
           <a:p>
-            <a:pPr indent="0" marL="0">
+            <a:pPr marL="0" indent="0">
               <a:buNone/>
             </a:pPr>
             <a:r>
@@ -4865,7 +4863,7 @@
           <a:bodyPr wrap="square" lIns="0" tIns="0" rIns="0" bIns="0" rtlCol="0" anchor="ctr"/>
           <a:lstStyle/>
           <a:p>
-            <a:pPr indent="0" marL="0">
+            <a:pPr marL="0" indent="0">
               <a:buNone/>
             </a:pPr>
             <a:endParaRPr lang="en-US" sz="900" dirty="0"/>
@@ -4893,7 +4891,7 @@
           <a:bodyPr wrap="square" lIns="0" tIns="0" rIns="0" bIns="0" rtlCol="0" anchor="ctr"/>
           <a:lstStyle/>
           <a:p>
-            <a:pPr indent="0" marL="0">
+            <a:pPr marL="0" indent="0">
               <a:buNone/>
             </a:pPr>
             <a:r>
@@ -4932,7 +4930,7 @@
           <a:bodyPr wrap="square" lIns="0" tIns="0" rIns="0" bIns="0" rtlCol="0" anchor="ctr"/>
           <a:lstStyle/>
           <a:p>
-            <a:pPr indent="0" marL="0">
+            <a:pPr marL="0" indent="0">
               <a:buNone/>
             </a:pPr>
             <a:r>
@@ -4971,7 +4969,7 @@
           <a:bodyPr wrap="square" lIns="0" tIns="0" rIns="0" bIns="0" rtlCol="0" anchor="ctr"/>
           <a:lstStyle/>
           <a:p>
-            <a:pPr indent="0" marL="0">
+            <a:pPr marL="0" indent="0">
               <a:buNone/>
             </a:pPr>
             <a:r>
@@ -5010,7 +5008,7 @@
           <a:bodyPr wrap="square" lIns="0" tIns="0" rIns="0" bIns="0" rtlCol="0" anchor="ctr"/>
           <a:lstStyle/>
           <a:p>
-            <a:pPr algn="ctr" indent="0" marL="0">
+            <a:pPr marL="0" indent="0" algn="ctr">
               <a:buNone/>
             </a:pPr>
             <a:r>
@@ -5051,7 +5049,7 @@
             <a:prstDash val="solid"/>
           </a:ln>
           <a:effectLst>
-            <a:outerShdw sx="100000" sy="100000" kx="0" ky="0" algn="bl" rotWithShape="0" blurRad="101600" dist="38100" dir="2700000">
+            <a:outerShdw blurRad="101600" dist="38100" dir="2700000" algn="bl" rotWithShape="0">
               <a:srgbClr val="000000">
                 <a:alpha val="12000"/>
               </a:srgbClr>
@@ -5107,7 +5105,7 @@
           <a:bodyPr wrap="square" lIns="0" tIns="0" rIns="0" bIns="0" rtlCol="0" anchor="ctr"/>
           <a:lstStyle/>
           <a:p>
-            <a:pPr algn="ctr" indent="0" marL="0">
+            <a:pPr marL="0" indent="0" algn="ctr">
               <a:buNone/>
             </a:pPr>
             <a:r>
@@ -5151,7 +5149,7 @@
             <a:prstDash val="solid"/>
           </a:ln>
           <a:effectLst>
-            <a:outerShdw sx="100000" sy="100000" kx="0" ky="0" algn="bl" rotWithShape="0" blurRad="101600" dist="38100" dir="2700000">
+            <a:outerShdw blurRad="101600" dist="38100" dir="2700000" algn="bl" rotWithShape="0">
               <a:srgbClr val="000000">
                 <a:alpha val="12000"/>
               </a:srgbClr>
@@ -5180,7 +5178,7 @@
           <a:bodyPr wrap="square" lIns="0" tIns="0" rIns="0" bIns="0" rtlCol="0" anchor="ctr"/>
           <a:lstStyle/>
           <a:p>
-            <a:pPr indent="0" marL="0">
+            <a:pPr marL="0" indent="0">
               <a:buNone/>
             </a:pPr>
             <a:r>
@@ -5219,7 +5217,7 @@
           <a:bodyPr wrap="square" lIns="0" tIns="0" rIns="0" bIns="0" rtlCol="0" anchor="ctr"/>
           <a:lstStyle/>
           <a:p>
-            <a:pPr indent="0" marL="0">
+            <a:pPr marL="0" indent="0">
               <a:buNone/>
             </a:pPr>
             <a:r>
@@ -5258,7 +5256,7 @@
           <a:bodyPr wrap="square" lIns="0" tIns="0" rIns="0" bIns="0" rtlCol="0" anchor="ctr"/>
           <a:lstStyle/>
           <a:p>
-            <a:pPr indent="0" marL="0">
+            <a:pPr marL="0" indent="0">
               <a:buNone/>
             </a:pPr>
             <a:r>
@@ -5297,7 +5295,7 @@
           <a:bodyPr wrap="square" lIns="0" tIns="0" rIns="0" bIns="0" rtlCol="0" anchor="ctr"/>
           <a:lstStyle/>
           <a:p>
-            <a:pPr indent="0" marL="0">
+            <a:pPr marL="0" indent="0">
               <a:buNone/>
             </a:pPr>
             <a:endParaRPr lang="en-US" sz="900" dirty="0"/>
@@ -5325,7 +5323,7 @@
           <a:bodyPr wrap="square" lIns="0" tIns="0" rIns="0" bIns="0" rtlCol="0" anchor="ctr"/>
           <a:lstStyle/>
           <a:p>
-            <a:pPr indent="0" marL="0">
+            <a:pPr marL="0" indent="0">
               <a:buNone/>
             </a:pPr>
             <a:r>
@@ -5364,7 +5362,7 @@
           <a:bodyPr wrap="square" lIns="0" tIns="0" rIns="0" bIns="0" rtlCol="0" anchor="ctr"/>
           <a:lstStyle/>
           <a:p>
-            <a:pPr indent="0" marL="0">
+            <a:pPr marL="0" indent="0">
               <a:buNone/>
             </a:pPr>
             <a:r>
@@ -5403,7 +5401,7 @@
           <a:bodyPr wrap="square" lIns="0" tIns="0" rIns="0" bIns="0" rtlCol="0" anchor="ctr"/>
           <a:lstStyle/>
           <a:p>
-            <a:pPr indent="0" marL="0">
+            <a:pPr marL="0" indent="0">
               <a:buNone/>
             </a:pPr>
             <a:r>
@@ -5467,7 +5465,7 @@
           <a:bodyPr wrap="square" lIns="0" tIns="0" rIns="0" bIns="0" rtlCol="0" anchor="ctr"/>
           <a:lstStyle/>
           <a:p>
-            <a:pPr algn="ctr" indent="0" marL="0">
+            <a:pPr marL="0" indent="0" algn="ctr">
               <a:buNone/>
             </a:pPr>
             <a:r>
@@ -5501,6 +5499,7 @@
         <a:solidFill>
           <a:srgbClr val="FFFFFF"/>
         </a:solidFill>
+        <a:effectLst/>
       </p:bgPr>
     </p:bg>
     <p:spTree>
@@ -5563,7 +5562,7 @@
           <a:bodyPr wrap="square" lIns="0" tIns="0" rIns="0" bIns="0" rtlCol="0" anchor="ctr"/>
           <a:lstStyle/>
           <a:p>
-            <a:pPr indent="0" marL="0">
+            <a:pPr marL="0" indent="0">
               <a:buNone/>
             </a:pPr>
             <a:r>
@@ -5629,7 +5628,7 @@
           <a:bodyPr wrap="square" lIns="0" tIns="0" rIns="0" bIns="0" rtlCol="0" anchor="ctr"/>
           <a:lstStyle/>
           <a:p>
-            <a:pPr algn="ctr" indent="0" marL="0">
+            <a:pPr marL="0" indent="0" algn="ctr">
               <a:buNone/>
             </a:pPr>
             <a:r>
@@ -5673,7 +5672,7 @@
             <a:prstDash val="solid"/>
           </a:ln>
           <a:effectLst>
-            <a:outerShdw sx="100000" sy="100000" kx="0" ky="0" algn="bl" rotWithShape="0" blurRad="101600" dist="38100" dir="2700000">
+            <a:outerShdw blurRad="101600" dist="38100" dir="2700000" algn="bl" rotWithShape="0">
               <a:srgbClr val="000000">
                 <a:alpha val="12000"/>
               </a:srgbClr>
@@ -5729,7 +5728,7 @@
           <a:bodyPr wrap="square" lIns="0" tIns="0" rIns="0" bIns="0" rtlCol="0" anchor="ctr"/>
           <a:lstStyle/>
           <a:p>
-            <a:pPr algn="ctr" indent="0" marL="0">
+            <a:pPr marL="0" indent="0" algn="ctr">
               <a:buNone/>
             </a:pPr>
             <a:r>
@@ -5768,7 +5767,7 @@
           <a:bodyPr wrap="square" lIns="0" tIns="0" rIns="0" bIns="0" rtlCol="0" anchor="ctr"/>
           <a:lstStyle/>
           <a:p>
-            <a:pPr indent="0" marL="0">
+            <a:pPr marL="0" indent="0">
               <a:buNone/>
             </a:pPr>
             <a:r>
@@ -5807,7 +5806,7 @@
           <a:bodyPr wrap="square" lIns="0" tIns="0" rIns="0" bIns="0" rtlCol="0" anchor="ctr"/>
           <a:lstStyle/>
           <a:p>
-            <a:pPr indent="0" marL="0">
+            <a:pPr marL="0" indent="0">
               <a:buNone/>
             </a:pPr>
             <a:r>
@@ -5851,7 +5850,7 @@
             <a:prstDash val="solid"/>
           </a:ln>
           <a:effectLst>
-            <a:outerShdw sx="100000" sy="100000" kx="0" ky="0" algn="bl" rotWithShape="0" blurRad="101600" dist="38100" dir="2700000">
+            <a:outerShdw blurRad="101600" dist="38100" dir="2700000" algn="bl" rotWithShape="0">
               <a:srgbClr val="000000">
                 <a:alpha val="12000"/>
               </a:srgbClr>
@@ -5907,7 +5906,7 @@
           <a:bodyPr wrap="square" lIns="0" tIns="0" rIns="0" bIns="0" rtlCol="0" anchor="ctr"/>
           <a:lstStyle/>
           <a:p>
-            <a:pPr algn="ctr" indent="0" marL="0">
+            <a:pPr marL="0" indent="0" algn="ctr">
               <a:buNone/>
             </a:pPr>
             <a:r>
@@ -5946,7 +5945,7 @@
           <a:bodyPr wrap="square" lIns="0" tIns="0" rIns="0" bIns="0" rtlCol="0" anchor="ctr"/>
           <a:lstStyle/>
           <a:p>
-            <a:pPr indent="0" marL="0">
+            <a:pPr marL="0" indent="0">
               <a:buNone/>
             </a:pPr>
             <a:r>
@@ -5985,7 +5984,7 @@
           <a:bodyPr wrap="square" lIns="0" tIns="0" rIns="0" bIns="0" rtlCol="0" anchor="ctr"/>
           <a:lstStyle/>
           <a:p>
-            <a:pPr indent="0" marL="0">
+            <a:pPr marL="0" indent="0">
               <a:buNone/>
             </a:pPr>
             <a:r>
@@ -6029,7 +6028,7 @@
             <a:prstDash val="solid"/>
           </a:ln>
           <a:effectLst>
-            <a:outerShdw sx="100000" sy="100000" kx="0" ky="0" algn="bl" rotWithShape="0" blurRad="101600" dist="38100" dir="2700000">
+            <a:outerShdw blurRad="101600" dist="38100" dir="2700000" algn="bl" rotWithShape="0">
               <a:srgbClr val="000000">
                 <a:alpha val="12000"/>
               </a:srgbClr>
@@ -6085,7 +6084,7 @@
           <a:bodyPr wrap="square" lIns="0" tIns="0" rIns="0" bIns="0" rtlCol="0" anchor="ctr"/>
           <a:lstStyle/>
           <a:p>
-            <a:pPr algn="ctr" indent="0" marL="0">
+            <a:pPr marL="0" indent="0" algn="ctr">
               <a:buNone/>
             </a:pPr>
             <a:r>
@@ -6124,7 +6123,7 @@
           <a:bodyPr wrap="square" lIns="0" tIns="0" rIns="0" bIns="0" rtlCol="0" anchor="ctr"/>
           <a:lstStyle/>
           <a:p>
-            <a:pPr indent="0" marL="0">
+            <a:pPr marL="0" indent="0">
               <a:buNone/>
             </a:pPr>
             <a:r>
@@ -6163,7 +6162,7 @@
           <a:bodyPr wrap="square" lIns="0" tIns="0" rIns="0" bIns="0" rtlCol="0" anchor="ctr"/>
           <a:lstStyle/>
           <a:p>
-            <a:pPr indent="0" marL="0">
+            <a:pPr marL="0" indent="0">
               <a:buNone/>
             </a:pPr>
             <a:r>
@@ -6227,7 +6226,7 @@
           <a:bodyPr wrap="square" lIns="0" tIns="0" rIns="0" bIns="0" rtlCol="0" anchor="ctr"/>
           <a:lstStyle/>
           <a:p>
-            <a:pPr algn="ctr" indent="0" marL="0">
+            <a:pPr marL="0" indent="0" algn="ctr">
               <a:buNone/>
             </a:pPr>
             <a:r>
@@ -6261,6 +6260,7 @@
         <a:solidFill>
           <a:srgbClr val="FFFFFF"/>
         </a:solidFill>
+        <a:effectLst/>
       </p:bgPr>
     </p:bg>
     <p:spTree>
@@ -6323,7 +6323,7 @@
           <a:bodyPr wrap="square" lIns="0" tIns="0" rIns="0" bIns="0" rtlCol="0" anchor="ctr"/>
           <a:lstStyle/>
           <a:p>
-            <a:pPr indent="0" marL="0">
+            <a:pPr marL="0" indent="0">
               <a:buNone/>
             </a:pPr>
             <a:r>
@@ -6389,7 +6389,7 @@
           <a:bodyPr wrap="square" lIns="0" tIns="0" rIns="0" bIns="0" rtlCol="0" anchor="ctr"/>
           <a:lstStyle/>
           <a:p>
-            <a:pPr algn="ctr" indent="0" marL="0">
+            <a:pPr marL="0" indent="0" algn="ctr">
               <a:buNone/>
             </a:pPr>
             <a:r>
@@ -6433,7 +6433,7 @@
             <a:prstDash val="solid"/>
           </a:ln>
           <a:effectLst>
-            <a:outerShdw sx="100000" sy="100000" kx="0" ky="0" algn="bl" rotWithShape="0" blurRad="101600" dist="38100" dir="2700000">
+            <a:outerShdw blurRad="101600" dist="38100" dir="2700000" algn="bl" rotWithShape="0">
               <a:srgbClr val="000000">
                 <a:alpha val="12000"/>
               </a:srgbClr>
@@ -6462,7 +6462,7 @@
           <a:bodyPr wrap="square" lIns="0" tIns="0" rIns="0" bIns="0" rtlCol="0" anchor="ctr"/>
           <a:lstStyle/>
           <a:p>
-            <a:pPr indent="0" marL="0">
+            <a:pPr marL="0" indent="0">
               <a:buNone/>
             </a:pPr>
             <a:r>
@@ -6506,7 +6506,7 @@
             <a:prstDash val="solid"/>
           </a:ln>
           <a:effectLst>
-            <a:outerShdw sx="100000" sy="100000" kx="0" ky="0" algn="bl" rotWithShape="0" blurRad="101600" dist="38100" dir="2700000">
+            <a:outerShdw blurRad="101600" dist="38100" dir="2700000" algn="bl" rotWithShape="0">
               <a:srgbClr val="000000">
                 <a:alpha val="12000"/>
               </a:srgbClr>
@@ -6535,7 +6535,7 @@
           <a:bodyPr wrap="square" lIns="0" tIns="0" rIns="0" bIns="0" rtlCol="0" anchor="ctr"/>
           <a:lstStyle/>
           <a:p>
-            <a:pPr indent="0" marL="0">
+            <a:pPr marL="0" indent="0">
               <a:buNone/>
             </a:pPr>
             <a:r>
@@ -6571,7 +6571,7 @@
           <a:bodyPr wrap="square" lIns="0" tIns="0" rIns="0" bIns="0" rtlCol="0" anchor="ctr"/>
           <a:lstStyle/>
           <a:p>
-            <a:pPr indent="0" marL="0">
+            <a:pPr marL="0" indent="0">
               <a:buNone/>
             </a:pPr>
             <a:r>
@@ -6610,7 +6610,7 @@
           <a:bodyPr wrap="square" lIns="0" tIns="0" rIns="0" bIns="0" rtlCol="0" anchor="ctr"/>
           <a:lstStyle/>
           <a:p>
-            <a:pPr indent="0" marL="0">
+            <a:pPr marL="0" indent="0">
               <a:buNone/>
             </a:pPr>
             <a:r>
@@ -6654,7 +6654,7 @@
             <a:prstDash val="solid"/>
           </a:ln>
           <a:effectLst>
-            <a:outerShdw sx="100000" sy="100000" kx="0" ky="0" algn="bl" rotWithShape="0" blurRad="101600" dist="38100" dir="2700000">
+            <a:outerShdw blurRad="101600" dist="38100" dir="2700000" algn="bl" rotWithShape="0">
               <a:srgbClr val="000000">
                 <a:alpha val="12000"/>
               </a:srgbClr>
@@ -6683,7 +6683,7 @@
           <a:bodyPr wrap="square" lIns="0" tIns="0" rIns="0" bIns="0" rtlCol="0" anchor="ctr"/>
           <a:lstStyle/>
           <a:p>
-            <a:pPr indent="0" marL="0">
+            <a:pPr marL="0" indent="0">
               <a:buNone/>
             </a:pPr>
             <a:r>
@@ -6719,7 +6719,7 @@
           <a:bodyPr wrap="square" lIns="0" tIns="0" rIns="0" bIns="0" rtlCol="0" anchor="ctr"/>
           <a:lstStyle/>
           <a:p>
-            <a:pPr indent="0" marL="0">
+            <a:pPr marL="0" indent="0">
               <a:buNone/>
             </a:pPr>
             <a:r>
@@ -6758,7 +6758,7 @@
           <a:bodyPr wrap="square" lIns="0" tIns="0" rIns="0" bIns="0" rtlCol="0" anchor="ctr"/>
           <a:lstStyle/>
           <a:p>
-            <a:pPr indent="0" marL="0">
+            <a:pPr marL="0" indent="0">
               <a:buNone/>
             </a:pPr>
             <a:r>
@@ -6802,7 +6802,7 @@
             <a:prstDash val="solid"/>
           </a:ln>
           <a:effectLst>
-            <a:outerShdw sx="100000" sy="100000" kx="0" ky="0" algn="bl" rotWithShape="0" blurRad="101600" dist="38100" dir="2700000">
+            <a:outerShdw blurRad="101600" dist="38100" dir="2700000" algn="bl" rotWithShape="0">
               <a:srgbClr val="000000">
                 <a:alpha val="12000"/>
               </a:srgbClr>
@@ -6831,7 +6831,7 @@
           <a:bodyPr wrap="square" lIns="0" tIns="0" rIns="0" bIns="0" rtlCol="0" anchor="ctr"/>
           <a:lstStyle/>
           <a:p>
-            <a:pPr indent="0" marL="0">
+            <a:pPr marL="0" indent="0">
               <a:buNone/>
             </a:pPr>
             <a:r>
@@ -6867,7 +6867,7 @@
           <a:bodyPr wrap="square" lIns="0" tIns="0" rIns="0" bIns="0" rtlCol="0" anchor="ctr"/>
           <a:lstStyle/>
           <a:p>
-            <a:pPr indent="0" marL="0">
+            <a:pPr marL="0" indent="0">
               <a:buNone/>
             </a:pPr>
             <a:r>
@@ -6906,7 +6906,7 @@
           <a:bodyPr wrap="square" lIns="0" tIns="0" rIns="0" bIns="0" rtlCol="0" anchor="ctr"/>
           <a:lstStyle/>
           <a:p>
-            <a:pPr indent="0" marL="0">
+            <a:pPr marL="0" indent="0">
               <a:buNone/>
             </a:pPr>
             <a:r>
@@ -6970,7 +6970,7 @@
           <a:bodyPr wrap="square" lIns="0" tIns="0" rIns="0" bIns="0" rtlCol="0" anchor="ctr"/>
           <a:lstStyle/>
           <a:p>
-            <a:pPr algn="ctr" indent="0" marL="0">
+            <a:pPr marL="0" indent="0" algn="ctr">
               <a:buNone/>
             </a:pPr>
             <a:r>
@@ -7004,6 +7004,7 @@
         <a:solidFill>
           <a:srgbClr val="FFFFFF"/>
         </a:solidFill>
+        <a:effectLst/>
       </p:bgPr>
     </p:bg>
     <p:spTree>
@@ -7066,7 +7067,7 @@
           <a:bodyPr wrap="square" lIns="0" tIns="0" rIns="0" bIns="0" rtlCol="0" anchor="ctr"/>
           <a:lstStyle/>
           <a:p>
-            <a:pPr indent="0" marL="0">
+            <a:pPr marL="0" indent="0">
               <a:buNone/>
             </a:pPr>
             <a:r>
@@ -7132,7 +7133,7 @@
           <a:bodyPr wrap="square" lIns="0" tIns="0" rIns="0" bIns="0" rtlCol="0" anchor="ctr"/>
           <a:lstStyle/>
           <a:p>
-            <a:pPr algn="ctr" indent="0" marL="0">
+            <a:pPr marL="0" indent="0" algn="ctr">
               <a:buNone/>
             </a:pPr>
             <a:r>
@@ -7176,7 +7177,7 @@
             <a:prstDash val="solid"/>
           </a:ln>
           <a:effectLst>
-            <a:outerShdw sx="100000" sy="100000" kx="0" ky="0" algn="bl" rotWithShape="0" blurRad="101600" dist="38100" dir="2700000">
+            <a:outerShdw blurRad="101600" dist="38100" dir="2700000" algn="bl" rotWithShape="0">
               <a:srgbClr val="000000">
                 <a:alpha val="12000"/>
               </a:srgbClr>
@@ -7205,7 +7206,7 @@
           <a:bodyPr wrap="square" lIns="0" tIns="0" rIns="0" bIns="0" rtlCol="0" anchor="ctr"/>
           <a:lstStyle/>
           <a:p>
-            <a:pPr indent="0" marL="0">
+            <a:pPr marL="0" indent="0">
               <a:buNone/>
             </a:pPr>
             <a:r>
@@ -7249,7 +7250,7 @@
             <a:prstDash val="solid"/>
           </a:ln>
           <a:effectLst>
-            <a:outerShdw sx="100000" sy="100000" kx="0" ky="0" algn="bl" rotWithShape="0" blurRad="101600" dist="38100" dir="2700000">
+            <a:outerShdw blurRad="101600" dist="38100" dir="2700000" algn="bl" rotWithShape="0">
               <a:srgbClr val="000000">
                 <a:alpha val="12000"/>
               </a:srgbClr>
@@ -7278,7 +7279,7 @@
           <a:bodyPr wrap="square" lIns="0" tIns="0" rIns="0" bIns="0" rtlCol="0" anchor="ctr"/>
           <a:lstStyle/>
           <a:p>
-            <a:pPr indent="0" marL="0">
+            <a:pPr marL="0" indent="0">
               <a:buNone/>
             </a:pPr>
             <a:r>
@@ -7317,7 +7318,7 @@
           <a:bodyPr wrap="square" lIns="0" tIns="0" rIns="0" bIns="0" rtlCol="0" anchor="ctr"/>
           <a:lstStyle/>
           <a:p>
-            <a:pPr indent="0" marL="0">
+            <a:pPr marL="0" indent="0">
               <a:buNone/>
             </a:pPr>
             <a:r>
@@ -7361,7 +7362,7 @@
             <a:prstDash val="solid"/>
           </a:ln>
           <a:effectLst>
-            <a:outerShdw sx="100000" sy="100000" kx="0" ky="0" algn="bl" rotWithShape="0" blurRad="101600" dist="38100" dir="2700000">
+            <a:outerShdw blurRad="101600" dist="38100" dir="2700000" algn="bl" rotWithShape="0">
               <a:srgbClr val="000000">
                 <a:alpha val="12000"/>
               </a:srgbClr>
@@ -7390,7 +7391,7 @@
           <a:bodyPr wrap="square" lIns="0" tIns="0" rIns="0" bIns="0" rtlCol="0" anchor="ctr"/>
           <a:lstStyle/>
           <a:p>
-            <a:pPr algn="ctr" indent="0" marL="0">
+            <a:pPr marL="0" indent="0" algn="ctr">
               <a:buNone/>
             </a:pPr>
             <a:r>
@@ -7426,7 +7427,7 @@
           <a:bodyPr wrap="square" lIns="0" tIns="0" rIns="0" bIns="0" rtlCol="0" anchor="ctr"/>
           <a:lstStyle/>
           <a:p>
-            <a:pPr algn="ctr" indent="0" marL="0">
+            <a:pPr marL="0" indent="0" algn="ctr">
               <a:buNone/>
             </a:pPr>
             <a:r>
@@ -7443,7 +7444,7 @@
             <a:endParaRPr lang="en-US" sz="1000" dirty="0"/>
           </a:p>
           <a:p>
-            <a:pPr algn="ctr" indent="0" marL="0">
+            <a:pPr marL="0" indent="0" algn="ctr">
               <a:buNone/>
             </a:pPr>
             <a:r>
@@ -7482,7 +7483,7 @@
           <a:bodyPr wrap="square" lIns="0" tIns="0" rIns="0" bIns="0" rtlCol="0" anchor="ctr"/>
           <a:lstStyle/>
           <a:p>
-            <a:pPr algn="ctr" indent="0" marL="0">
+            <a:pPr marL="0" indent="0" algn="ctr">
               <a:buNone/>
             </a:pPr>
             <a:r>
@@ -7526,7 +7527,7 @@
             <a:prstDash val="solid"/>
           </a:ln>
           <a:effectLst>
-            <a:outerShdw sx="100000" sy="100000" kx="0" ky="0" algn="bl" rotWithShape="0" blurRad="101600" dist="38100" dir="2700000">
+            <a:outerShdw blurRad="101600" dist="38100" dir="2700000" algn="bl" rotWithShape="0">
               <a:srgbClr val="000000">
                 <a:alpha val="12000"/>
               </a:srgbClr>
@@ -7555,7 +7556,7 @@
           <a:bodyPr wrap="square" lIns="0" tIns="0" rIns="0" bIns="0" rtlCol="0" anchor="ctr"/>
           <a:lstStyle/>
           <a:p>
-            <a:pPr algn="ctr" indent="0" marL="0">
+            <a:pPr marL="0" indent="0" algn="ctr">
               <a:buNone/>
             </a:pPr>
             <a:r>
@@ -7591,7 +7592,7 @@
           <a:bodyPr wrap="square" lIns="0" tIns="0" rIns="0" bIns="0" rtlCol="0" anchor="ctr"/>
           <a:lstStyle/>
           <a:p>
-            <a:pPr algn="ctr" indent="0" marL="0">
+            <a:pPr marL="0" indent="0" algn="ctr">
               <a:buNone/>
             </a:pPr>
             <a:r>
@@ -7608,7 +7609,7 @@
             <a:endParaRPr lang="en-US" sz="1000" dirty="0"/>
           </a:p>
           <a:p>
-            <a:pPr algn="ctr" indent="0" marL="0">
+            <a:pPr marL="0" indent="0" algn="ctr">
               <a:buNone/>
             </a:pPr>
             <a:r>
@@ -7647,7 +7648,7 @@
           <a:bodyPr wrap="square" lIns="0" tIns="0" rIns="0" bIns="0" rtlCol="0" anchor="ctr"/>
           <a:lstStyle/>
           <a:p>
-            <a:pPr algn="ctr" indent="0" marL="0">
+            <a:pPr marL="0" indent="0" algn="ctr">
               <a:buNone/>
             </a:pPr>
             <a:r>
@@ -7686,7 +7687,7 @@
           <a:bodyPr wrap="square" lIns="0" tIns="0" rIns="0" bIns="0" rtlCol="0" anchor="ctr"/>
           <a:lstStyle/>
           <a:p>
-            <a:pPr algn="ctr" indent="0" marL="0">
+            <a:pPr marL="0" indent="0" algn="ctr">
               <a:buNone/>
             </a:pPr>
             <a:r>
@@ -7730,7 +7731,7 @@
             <a:prstDash val="solid"/>
           </a:ln>
           <a:effectLst>
-            <a:outerShdw sx="100000" sy="100000" kx="0" ky="0" algn="bl" rotWithShape="0" blurRad="101600" dist="38100" dir="2700000">
+            <a:outerShdw blurRad="101600" dist="38100" dir="2700000" algn="bl" rotWithShape="0">
               <a:srgbClr val="000000">
                 <a:alpha val="12000"/>
               </a:srgbClr>
@@ -7759,7 +7760,7 @@
           <a:bodyPr wrap="square" lIns="0" tIns="0" rIns="0" bIns="0" rtlCol="0" anchor="ctr"/>
           <a:lstStyle/>
           <a:p>
-            <a:pPr indent="0" marL="0">
+            <a:pPr marL="0" indent="0">
               <a:buNone/>
             </a:pPr>
             <a:r>
@@ -7798,7 +7799,7 @@
           <a:bodyPr wrap="square" lIns="0" tIns="0" rIns="0" bIns="0" rtlCol="0" anchor="ctr"/>
           <a:lstStyle/>
           <a:p>
-            <a:pPr indent="0" marL="0">
+            <a:pPr marL="0" indent="0">
               <a:buNone/>
             </a:pPr>
             <a:r>
@@ -7842,7 +7843,7 @@
             <a:prstDash val="solid"/>
           </a:ln>
           <a:effectLst>
-            <a:outerShdw sx="100000" sy="100000" kx="0" ky="0" algn="bl" rotWithShape="0" blurRad="101600" dist="38100" dir="2700000">
+            <a:outerShdw blurRad="101600" dist="38100" dir="2700000" algn="bl" rotWithShape="0">
               <a:srgbClr val="000000">
                 <a:alpha val="12000"/>
               </a:srgbClr>
@@ -7871,7 +7872,7 @@
           <a:bodyPr wrap="square" lIns="0" tIns="0" rIns="0" bIns="0" rtlCol="0" anchor="ctr"/>
           <a:lstStyle/>
           <a:p>
-            <a:pPr indent="0" marL="0">
+            <a:pPr marL="0" indent="0">
               <a:buNone/>
             </a:pPr>
             <a:r>
@@ -7910,7 +7911,7 @@
           <a:bodyPr wrap="square" lIns="0" tIns="0" rIns="0" bIns="0" rtlCol="0" anchor="ctr"/>
           <a:lstStyle/>
           <a:p>
-            <a:pPr indent="0" marL="0">
+            <a:pPr marL="0" indent="0">
               <a:buNone/>
             </a:pPr>
             <a:r>
@@ -7954,7 +7955,7 @@
             <a:prstDash val="solid"/>
           </a:ln>
           <a:effectLst>
-            <a:outerShdw sx="100000" sy="100000" kx="0" ky="0" algn="bl" rotWithShape="0" blurRad="101600" dist="38100" dir="2700000">
+            <a:outerShdw blurRad="101600" dist="38100" dir="2700000" algn="bl" rotWithShape="0">
               <a:srgbClr val="000000">
                 <a:alpha val="12000"/>
               </a:srgbClr>
@@ -7983,7 +7984,7 @@
           <a:bodyPr wrap="square" lIns="0" tIns="0" rIns="0" bIns="0" rtlCol="0" anchor="ctr"/>
           <a:lstStyle/>
           <a:p>
-            <a:pPr indent="0" marL="0">
+            <a:pPr marL="0" indent="0">
               <a:buNone/>
             </a:pPr>
             <a:r>
@@ -8022,7 +8023,7 @@
           <a:bodyPr wrap="square" lIns="0" tIns="0" rIns="0" bIns="0" rtlCol="0" anchor="ctr"/>
           <a:lstStyle/>
           <a:p>
-            <a:pPr indent="0" marL="0">
+            <a:pPr marL="0" indent="0">
               <a:buNone/>
             </a:pPr>
             <a:r>
@@ -8066,7 +8067,7 @@
             <a:prstDash val="solid"/>
           </a:ln>
           <a:effectLst>
-            <a:outerShdw sx="100000" sy="100000" kx="0" ky="0" algn="bl" rotWithShape="0" blurRad="101600" dist="38100" dir="2700000">
+            <a:outerShdw blurRad="101600" dist="38100" dir="2700000" algn="bl" rotWithShape="0">
               <a:srgbClr val="000000">
                 <a:alpha val="12000"/>
               </a:srgbClr>
@@ -8095,7 +8096,7 @@
           <a:bodyPr wrap="square" lIns="0" tIns="0" rIns="0" bIns="0" rtlCol="0" anchor="ctr"/>
           <a:lstStyle/>
           <a:p>
-            <a:pPr indent="0" marL="0">
+            <a:pPr marL="0" indent="0">
               <a:buNone/>
             </a:pPr>
             <a:r>
@@ -8134,7 +8135,7 @@
           <a:bodyPr wrap="square" lIns="0" tIns="0" rIns="0" bIns="0" rtlCol="0" anchor="ctr"/>
           <a:lstStyle/>
           <a:p>
-            <a:pPr indent="0" marL="0">
+            <a:pPr marL="0" indent="0">
               <a:buNone/>
             </a:pPr>
             <a:r>
@@ -8198,7 +8199,7 @@
           <a:bodyPr wrap="square" lIns="0" tIns="0" rIns="0" bIns="0" rtlCol="0" anchor="ctr"/>
           <a:lstStyle/>
           <a:p>
-            <a:pPr algn="ctr" indent="0" marL="0">
+            <a:pPr marL="0" indent="0" algn="ctr">
               <a:buNone/>
             </a:pPr>
             <a:r>
@@ -8232,6 +8233,7 @@
         <a:solidFill>
           <a:srgbClr val="FFFFFF"/>
         </a:solidFill>
+        <a:effectLst/>
       </p:bgPr>
     </p:bg>
     <p:spTree>
@@ -8294,7 +8296,7 @@
           <a:bodyPr wrap="square" lIns="0" tIns="0" rIns="0" bIns="0" rtlCol="0" anchor="ctr"/>
           <a:lstStyle/>
           <a:p>
-            <a:pPr indent="0" marL="0">
+            <a:pPr marL="0" indent="0">
               <a:buNone/>
             </a:pPr>
             <a:r>
@@ -8360,7 +8362,7 @@
           <a:bodyPr wrap="square" lIns="0" tIns="0" rIns="0" bIns="0" rtlCol="0" anchor="ctr"/>
           <a:lstStyle/>
           <a:p>
-            <a:pPr algn="ctr" indent="0" marL="0">
+            <a:pPr marL="0" indent="0" algn="ctr">
               <a:buNone/>
             </a:pPr>
             <a:r>
@@ -8404,7 +8406,7 @@
             <a:prstDash val="solid"/>
           </a:ln>
           <a:effectLst>
-            <a:outerShdw sx="100000" sy="100000" kx="0" ky="0" algn="bl" rotWithShape="0" blurRad="101600" dist="38100" dir="2700000">
+            <a:outerShdw blurRad="101600" dist="38100" dir="2700000" algn="bl" rotWithShape="0">
               <a:srgbClr val="000000">
                 <a:alpha val="12000"/>
               </a:srgbClr>
@@ -8433,7 +8435,7 @@
           <a:bodyPr wrap="square" lIns="0" tIns="0" rIns="0" bIns="0" rtlCol="0" anchor="ctr"/>
           <a:lstStyle/>
           <a:p>
-            <a:pPr indent="0" marL="0">
+            <a:pPr marL="0" indent="0">
               <a:buNone/>
             </a:pPr>
             <a:r>
@@ -8477,7 +8479,7 @@
             <a:prstDash val="solid"/>
           </a:ln>
           <a:effectLst>
-            <a:outerShdw sx="100000" sy="100000" kx="0" ky="0" algn="bl" rotWithShape="0" blurRad="101600" dist="38100" dir="2700000">
+            <a:outerShdw blurRad="101600" dist="38100" dir="2700000" algn="bl" rotWithShape="0">
               <a:srgbClr val="000000">
                 <a:alpha val="12000"/>
               </a:srgbClr>
@@ -8506,7 +8508,7 @@
           <a:bodyPr wrap="square" lIns="0" tIns="0" rIns="0" bIns="0" rtlCol="0" anchor="ctr"/>
           <a:lstStyle/>
           <a:p>
-            <a:pPr indent="0" marL="0">
+            <a:pPr marL="0" indent="0">
               <a:buNone/>
             </a:pPr>
             <a:r>
@@ -8545,7 +8547,7 @@
           <a:bodyPr wrap="square" lIns="0" tIns="0" rIns="0" bIns="0" rtlCol="0" anchor="ctr"/>
           <a:lstStyle/>
           <a:p>
-            <a:pPr indent="0" marL="0">
+            <a:pPr marL="0" indent="0">
               <a:buNone/>
             </a:pPr>
             <a:r>
@@ -8584,7 +8586,7 @@
           <a:bodyPr wrap="square" lIns="0" tIns="0" rIns="0" bIns="0" rtlCol="0" anchor="ctr"/>
           <a:lstStyle/>
           <a:p>
-            <a:pPr indent="0" marL="0">
+            <a:pPr marL="0" indent="0">
               <a:buNone/>
             </a:pPr>
             <a:r>
@@ -8623,7 +8625,7 @@
           <a:bodyPr wrap="square" lIns="0" tIns="0" rIns="0" bIns="0" rtlCol="0" anchor="ctr"/>
           <a:lstStyle/>
           <a:p>
-            <a:pPr indent="0" marL="0">
+            <a:pPr marL="0" indent="0">
               <a:buNone/>
             </a:pPr>
             <a:r>
@@ -8662,7 +8664,7 @@
           <a:bodyPr wrap="square" lIns="0" tIns="0" rIns="0" bIns="0" rtlCol="0" anchor="ctr"/>
           <a:lstStyle/>
           <a:p>
-            <a:pPr indent="0" marL="0">
+            <a:pPr marL="0" indent="0">
               <a:buNone/>
             </a:pPr>
             <a:r>
@@ -8701,7 +8703,7 @@
           <a:bodyPr wrap="square" lIns="0" tIns="0" rIns="0" bIns="0" rtlCol="0" anchor="ctr"/>
           <a:lstStyle/>
           <a:p>
-            <a:pPr indent="0" marL="0">
+            <a:pPr marL="0" indent="0">
               <a:buNone/>
             </a:pPr>
             <a:r>
@@ -8740,7 +8742,7 @@
           <a:bodyPr wrap="square" lIns="0" tIns="0" rIns="0" bIns="0" rtlCol="0" anchor="ctr"/>
           <a:lstStyle/>
           <a:p>
-            <a:pPr indent="0" marL="0">
+            <a:pPr marL="0" indent="0">
               <a:buNone/>
             </a:pPr>
             <a:r>
@@ -8779,7 +8781,7 @@
           <a:bodyPr wrap="square" lIns="0" tIns="0" rIns="0" bIns="0" rtlCol="0" anchor="ctr"/>
           <a:lstStyle/>
           <a:p>
-            <a:pPr indent="0" marL="0">
+            <a:pPr marL="0" indent="0">
               <a:buNone/>
             </a:pPr>
             <a:r>
@@ -8818,7 +8820,7 @@
           <a:bodyPr wrap="square" lIns="0" tIns="0" rIns="0" bIns="0" rtlCol="0" anchor="ctr"/>
           <a:lstStyle/>
           <a:p>
-            <a:pPr indent="0" marL="0">
+            <a:pPr marL="0" indent="0">
               <a:buNone/>
             </a:pPr>
             <a:r>
@@ -8857,7 +8859,7 @@
           <a:bodyPr wrap="square" lIns="0" tIns="0" rIns="0" bIns="0" rtlCol="0" anchor="ctr"/>
           <a:lstStyle/>
           <a:p>
-            <a:pPr indent="0" marL="0">
+            <a:pPr marL="0" indent="0">
               <a:buNone/>
             </a:pPr>
             <a:r>
@@ -8896,7 +8898,7 @@
           <a:bodyPr wrap="square" lIns="0" tIns="0" rIns="0" bIns="0" rtlCol="0" anchor="ctr"/>
           <a:lstStyle/>
           <a:p>
-            <a:pPr indent="0" marL="0">
+            <a:pPr marL="0" indent="0">
               <a:buNone/>
             </a:pPr>
             <a:r>
@@ -8935,7 +8937,7 @@
           <a:bodyPr wrap="square" lIns="0" tIns="0" rIns="0" bIns="0" rtlCol="0" anchor="ctr"/>
           <a:lstStyle/>
           <a:p>
-            <a:pPr indent="0" marL="0">
+            <a:pPr marL="0" indent="0">
               <a:buNone/>
             </a:pPr>
             <a:r>
@@ -8974,7 +8976,7 @@
           <a:bodyPr wrap="square" lIns="0" tIns="0" rIns="0" bIns="0" rtlCol="0" anchor="ctr"/>
           <a:lstStyle/>
           <a:p>
-            <a:pPr indent="0" marL="0">
+            <a:pPr marL="0" indent="0">
               <a:buNone/>
             </a:pPr>
             <a:r>
@@ -9013,7 +9015,7 @@
           <a:bodyPr wrap="square" lIns="0" tIns="0" rIns="0" bIns="0" rtlCol="0" anchor="ctr"/>
           <a:lstStyle/>
           <a:p>
-            <a:pPr indent="0" marL="0">
+            <a:pPr marL="0" indent="0">
               <a:buNone/>
             </a:pPr>
             <a:r>
@@ -9052,7 +9054,7 @@
           <a:bodyPr wrap="square" lIns="0" tIns="0" rIns="0" bIns="0" rtlCol="0" anchor="ctr"/>
           <a:lstStyle/>
           <a:p>
-            <a:pPr indent="0" marL="0">
+            <a:pPr marL="0" indent="0">
               <a:buNone/>
             </a:pPr>
             <a:r>
@@ -9116,7 +9118,7 @@
           <a:bodyPr wrap="square" lIns="0" tIns="0" rIns="0" bIns="0" rtlCol="0" anchor="ctr"/>
           <a:lstStyle/>
           <a:p>
-            <a:pPr algn="ctr" indent="0" marL="0">
+            <a:pPr marL="0" indent="0" algn="ctr">
               <a:buNone/>
             </a:pPr>
             <a:r>
@@ -9155,7 +9157,7 @@
           <a:bodyPr wrap="square" lIns="0" tIns="0" rIns="0" bIns="0" rtlCol="0" anchor="ctr"/>
           <a:lstStyle/>
           <a:p>
-            <a:pPr indent="0" marL="0">
+            <a:pPr marL="0" indent="0">
               <a:buNone/>
             </a:pPr>
             <a:r>
@@ -9194,7 +9196,7 @@
           <a:bodyPr wrap="square" lIns="0" tIns="0" rIns="0" bIns="0" rtlCol="0" anchor="ctr"/>
           <a:lstStyle/>
           <a:p>
-            <a:pPr indent="0" marL="0">
+            <a:pPr marL="0" indent="0">
               <a:buNone/>
             </a:pPr>
             <a:r>
@@ -9258,7 +9260,7 @@
           <a:bodyPr wrap="square" lIns="0" tIns="0" rIns="0" bIns="0" rtlCol="0" anchor="ctr"/>
           <a:lstStyle/>
           <a:p>
-            <a:pPr algn="ctr" indent="0" marL="0">
+            <a:pPr marL="0" indent="0" algn="ctr">
               <a:buNone/>
             </a:pPr>
             <a:r>
@@ -9297,7 +9299,7 @@
           <a:bodyPr wrap="square" lIns="0" tIns="0" rIns="0" bIns="0" rtlCol="0" anchor="ctr"/>
           <a:lstStyle/>
           <a:p>
-            <a:pPr indent="0" marL="0">
+            <a:pPr marL="0" indent="0">
               <a:buNone/>
             </a:pPr>
             <a:r>
@@ -9336,7 +9338,7 @@
           <a:bodyPr wrap="square" lIns="0" tIns="0" rIns="0" bIns="0" rtlCol="0" anchor="ctr"/>
           <a:lstStyle/>
           <a:p>
-            <a:pPr indent="0" marL="0">
+            <a:pPr marL="0" indent="0">
               <a:buNone/>
             </a:pPr>
             <a:r>
@@ -9400,7 +9402,7 @@
           <a:bodyPr wrap="square" lIns="0" tIns="0" rIns="0" bIns="0" rtlCol="0" anchor="ctr"/>
           <a:lstStyle/>
           <a:p>
-            <a:pPr algn="ctr" indent="0" marL="0">
+            <a:pPr marL="0" indent="0" algn="ctr">
               <a:buNone/>
             </a:pPr>
             <a:r>
@@ -9439,7 +9441,7 @@
           <a:bodyPr wrap="square" lIns="0" tIns="0" rIns="0" bIns="0" rtlCol="0" anchor="ctr"/>
           <a:lstStyle/>
           <a:p>
-            <a:pPr indent="0" marL="0">
+            <a:pPr marL="0" indent="0">
               <a:buNone/>
             </a:pPr>
             <a:r>
@@ -9478,7 +9480,7 @@
           <a:bodyPr wrap="square" lIns="0" tIns="0" rIns="0" bIns="0" rtlCol="0" anchor="ctr"/>
           <a:lstStyle/>
           <a:p>
-            <a:pPr indent="0" marL="0">
+            <a:pPr marL="0" indent="0">
               <a:buNone/>
             </a:pPr>
             <a:r>
@@ -9542,7 +9544,7 @@
           <a:bodyPr wrap="square" lIns="0" tIns="0" rIns="0" bIns="0" rtlCol="0" anchor="ctr"/>
           <a:lstStyle/>
           <a:p>
-            <a:pPr algn="ctr" indent="0" marL="0">
+            <a:pPr marL="0" indent="0" algn="ctr">
               <a:buNone/>
             </a:pPr>
             <a:r>
@@ -9581,7 +9583,7 @@
           <a:bodyPr wrap="square" lIns="0" tIns="0" rIns="0" bIns="0" rtlCol="0" anchor="ctr"/>
           <a:lstStyle/>
           <a:p>
-            <a:pPr indent="0" marL="0">
+            <a:pPr marL="0" indent="0">
               <a:buNone/>
             </a:pPr>
             <a:r>
@@ -9620,7 +9622,7 @@
           <a:bodyPr wrap="square" lIns="0" tIns="0" rIns="0" bIns="0" rtlCol="0" anchor="ctr"/>
           <a:lstStyle/>
           <a:p>
-            <a:pPr indent="0" marL="0">
+            <a:pPr marL="0" indent="0">
               <a:buNone/>
             </a:pPr>
             <a:r>
@@ -9684,7 +9686,7 @@
           <a:bodyPr wrap="square" lIns="0" tIns="0" rIns="0" bIns="0" rtlCol="0" anchor="ctr"/>
           <a:lstStyle/>
           <a:p>
-            <a:pPr algn="ctr" indent="0" marL="0">
+            <a:pPr marL="0" indent="0" algn="ctr">
               <a:buNone/>
             </a:pPr>
             <a:r>
@@ -9723,7 +9725,7 @@
           <a:bodyPr wrap="square" lIns="0" tIns="0" rIns="0" bIns="0" rtlCol="0" anchor="ctr"/>
           <a:lstStyle/>
           <a:p>
-            <a:pPr indent="0" marL="0">
+            <a:pPr marL="0" indent="0">
               <a:buNone/>
             </a:pPr>
             <a:r>
@@ -9762,7 +9764,7 @@
           <a:bodyPr wrap="square" lIns="0" tIns="0" rIns="0" bIns="0" rtlCol="0" anchor="ctr"/>
           <a:lstStyle/>
           <a:p>
-            <a:pPr indent="0" marL="0">
+            <a:pPr marL="0" indent="0">
               <a:buNone/>
             </a:pPr>
             <a:r>
@@ -9826,7 +9828,7 @@
           <a:bodyPr wrap="square" lIns="0" tIns="0" rIns="0" bIns="0" rtlCol="0" anchor="ctr"/>
           <a:lstStyle/>
           <a:p>
-            <a:pPr algn="ctr" indent="0" marL="0">
+            <a:pPr marL="0" indent="0" algn="ctr">
               <a:buNone/>
             </a:pPr>
             <a:r>
@@ -9865,7 +9867,7 @@
           <a:bodyPr wrap="square" lIns="0" tIns="0" rIns="0" bIns="0" rtlCol="0" anchor="ctr"/>
           <a:lstStyle/>
           <a:p>
-            <a:pPr indent="0" marL="0">
+            <a:pPr marL="0" indent="0">
               <a:buNone/>
             </a:pPr>
             <a:r>
@@ -9904,7 +9906,7 @@
           <a:bodyPr wrap="square" lIns="0" tIns="0" rIns="0" bIns="0" rtlCol="0" anchor="ctr"/>
           <a:lstStyle/>
           <a:p>
-            <a:pPr indent="0" marL="0">
+            <a:pPr marL="0" indent="0">
               <a:buNone/>
             </a:pPr>
             <a:r>
@@ -9968,7 +9970,7 @@
           <a:bodyPr wrap="square" lIns="0" tIns="0" rIns="0" bIns="0" rtlCol="0" anchor="ctr"/>
           <a:lstStyle/>
           <a:p>
-            <a:pPr algn="ctr" indent="0" marL="0">
+            <a:pPr marL="0" indent="0" algn="ctr">
               <a:buNone/>
             </a:pPr>
             <a:r>
@@ -10007,7 +10009,7 @@
           <a:bodyPr wrap="square" lIns="0" tIns="0" rIns="0" bIns="0" rtlCol="0" anchor="ctr"/>
           <a:lstStyle/>
           <a:p>
-            <a:pPr indent="0" marL="0">
+            <a:pPr marL="0" indent="0">
               <a:buNone/>
             </a:pPr>
             <a:r>
@@ -10046,7 +10048,7 @@
           <a:bodyPr wrap="square" lIns="0" tIns="0" rIns="0" bIns="0" rtlCol="0" anchor="ctr"/>
           <a:lstStyle/>
           <a:p>
-            <a:pPr indent="0" marL="0">
+            <a:pPr marL="0" indent="0">
               <a:buNone/>
             </a:pPr>
             <a:r>
@@ -10110,7 +10112,7 @@
           <a:bodyPr wrap="square" lIns="0" tIns="0" rIns="0" bIns="0" rtlCol="0" anchor="ctr"/>
           <a:lstStyle/>
           <a:p>
-            <a:pPr algn="ctr" indent="0" marL="0">
+            <a:pPr marL="0" indent="0" algn="ctr">
               <a:buNone/>
             </a:pPr>
             <a:r>
@@ -10144,6 +10146,7 @@
         <a:solidFill>
           <a:srgbClr val="0F172A"/>
         </a:solidFill>
+        <a:effectLst/>
       </p:bgPr>
     </p:bg>
     <p:spTree>
@@ -10235,11 +10238,11 @@
           <a:bodyPr wrap="square" lIns="0" tIns="0" rIns="0" bIns="0" rtlCol="0" anchor="ctr"/>
           <a:lstStyle/>
           <a:p>
-            <a:pPr indent="0" marL="0">
-              <a:buNone/>
-            </a:pPr>
-            <a:r>
-              <a:rPr lang="en-US" sz="1200" b="1" spc="400" kern="0" dirty="0">
+            <a:pPr marL="0" indent="0">
+              <a:buNone/>
+            </a:pPr>
+            <a:r>
+              <a:rPr lang="en-US" sz="1200" b="1" kern="0" spc="400" dirty="0">
                 <a:solidFill>
                   <a:srgbClr val="326CE5"/>
                 </a:solidFill>
@@ -10274,7 +10277,7 @@
           <a:bodyPr wrap="square" lIns="0" tIns="0" rIns="0" bIns="0" rtlCol="0" anchor="ctr"/>
           <a:lstStyle/>
           <a:p>
-            <a:pPr indent="0" marL="0">
+            <a:pPr marL="0" indent="0">
               <a:buNone/>
             </a:pPr>
             <a:r>
@@ -10313,7 +10316,7 @@
           <a:bodyPr wrap="square" lIns="0" tIns="0" rIns="0" bIns="0" rtlCol="0" anchor="ctr"/>
           <a:lstStyle/>
           <a:p>
-            <a:pPr indent="0" marL="0">
+            <a:pPr marL="0" indent="0">
               <a:buNone/>
             </a:pPr>
             <a:r>
@@ -10347,6 +10350,7 @@
         <a:solidFill>
           <a:srgbClr val="FFFFFF"/>
         </a:solidFill>
+        <a:effectLst/>
       </p:bgPr>
     </p:bg>
     <p:spTree>
@@ -10409,7 +10413,7 @@
           <a:bodyPr wrap="square" lIns="0" tIns="0" rIns="0" bIns="0" rtlCol="0" anchor="ctr"/>
           <a:lstStyle/>
           <a:p>
-            <a:pPr indent="0" marL="0">
+            <a:pPr marL="0" indent="0">
               <a:buNone/>
             </a:pPr>
             <a:r>
@@ -10475,7 +10479,7 @@
           <a:bodyPr wrap="square" lIns="0" tIns="0" rIns="0" bIns="0" rtlCol="0" anchor="ctr"/>
           <a:lstStyle/>
           <a:p>
-            <a:pPr algn="ctr" indent="0" marL="0">
+            <a:pPr marL="0" indent="0" algn="ctr">
               <a:buNone/>
             </a:pPr>
             <a:r>
@@ -10519,7 +10523,7 @@
             <a:prstDash val="solid"/>
           </a:ln>
           <a:effectLst>
-            <a:outerShdw sx="100000" sy="100000" kx="0" ky="0" algn="bl" rotWithShape="0" blurRad="101600" dist="38100" dir="2700000">
+            <a:outerShdw blurRad="101600" dist="38100" dir="2700000" algn="bl" rotWithShape="0">
               <a:srgbClr val="000000">
                 <a:alpha val="12000"/>
               </a:srgbClr>
@@ -10548,7 +10552,7 @@
           <a:bodyPr wrap="square" lIns="0" tIns="0" rIns="0" bIns="0" rtlCol="0" anchor="ctr"/>
           <a:lstStyle/>
           <a:p>
-            <a:pPr indent="0" marL="0">
+            <a:pPr marL="0" indent="0">
               <a:buNone/>
             </a:pPr>
             <a:r>
@@ -10587,7 +10591,7 @@
           <a:bodyPr wrap="square" lIns="0" tIns="0" rIns="0" bIns="0" rtlCol="0" anchor="ctr"/>
           <a:lstStyle/>
           <a:p>
-            <a:pPr algn="ctr" indent="0" marL="0">
+            <a:pPr marL="0" indent="0" algn="ctr">
               <a:buNone/>
             </a:pPr>
             <a:r>
@@ -10631,7 +10635,7 @@
             <a:prstDash val="solid"/>
           </a:ln>
           <a:effectLst>
-            <a:outerShdw sx="100000" sy="100000" kx="0" ky="0" algn="bl" rotWithShape="0" blurRad="101600" dist="38100" dir="2700000">
+            <a:outerShdw blurRad="101600" dist="38100" dir="2700000" algn="bl" rotWithShape="0">
               <a:srgbClr val="000000">
                 <a:alpha val="12000"/>
               </a:srgbClr>
@@ -10660,7 +10664,7 @@
           <a:bodyPr wrap="square" lIns="0" tIns="0" rIns="0" bIns="0" rtlCol="0" anchor="ctr"/>
           <a:lstStyle/>
           <a:p>
-            <a:pPr indent="0" marL="0">
+            <a:pPr marL="0" indent="0">
               <a:buNone/>
             </a:pPr>
             <a:r>
@@ -10699,7 +10703,7 @@
           <a:bodyPr wrap="square" lIns="0" tIns="0" rIns="0" bIns="0" rtlCol="0" anchor="ctr"/>
           <a:lstStyle/>
           <a:p>
-            <a:pPr indent="0" marL="0">
+            <a:pPr marL="0" indent="0">
               <a:buNone/>
             </a:pPr>
             <a:r>
@@ -10716,7 +10720,7 @@
             <a:endParaRPr lang="en-US" sz="1000" dirty="0"/>
           </a:p>
           <a:p>
-            <a:pPr indent="0" marL="0">
+            <a:pPr marL="0" indent="0">
               <a:buNone/>
             </a:pPr>
             <a:r>
@@ -10755,7 +10759,7 @@
           <a:bodyPr wrap="square" lIns="0" tIns="0" rIns="0" bIns="0" rtlCol="0" anchor="ctr"/>
           <a:lstStyle/>
           <a:p>
-            <a:pPr indent="0" marL="0">
+            <a:pPr marL="0" indent="0">
               <a:buNone/>
             </a:pPr>
             <a:r>
@@ -10772,7 +10776,7 @@
             <a:endParaRPr lang="en-US" sz="950" dirty="0"/>
           </a:p>
           <a:p>
-            <a:pPr indent="0" marL="0">
+            <a:pPr marL="0" indent="0">
               <a:buNone/>
             </a:pPr>
             <a:r>
@@ -10789,7 +10793,7 @@
             <a:endParaRPr lang="en-US" sz="950" dirty="0"/>
           </a:p>
           <a:p>
-            <a:pPr indent="0" marL="0">
+            <a:pPr marL="0" indent="0">
               <a:buNone/>
             </a:pPr>
             <a:r>
@@ -10828,7 +10832,7 @@
           <a:bodyPr wrap="square" lIns="0" tIns="0" rIns="0" bIns="0" rtlCol="0" anchor="ctr"/>
           <a:lstStyle/>
           <a:p>
-            <a:pPr algn="ctr" indent="0" marL="0">
+            <a:pPr marL="0" indent="0" algn="ctr">
               <a:buNone/>
             </a:pPr>
             <a:r>
@@ -10869,7 +10873,7 @@
             <a:prstDash val="solid"/>
           </a:ln>
           <a:effectLst>
-            <a:outerShdw sx="100000" sy="100000" kx="0" ky="0" algn="bl" rotWithShape="0" blurRad="101600" dist="38100" dir="2700000">
+            <a:outerShdw blurRad="101600" dist="38100" dir="2700000" algn="bl" rotWithShape="0">
               <a:srgbClr val="000000">
                 <a:alpha val="12000"/>
               </a:srgbClr>
@@ -10898,7 +10902,7 @@
           <a:bodyPr wrap="square" lIns="0" tIns="0" rIns="0" bIns="0" rtlCol="0" anchor="ctr"/>
           <a:lstStyle/>
           <a:p>
-            <a:pPr indent="0" marL="0">
+            <a:pPr marL="0" indent="0">
               <a:buNone/>
             </a:pPr>
             <a:r>
@@ -10937,7 +10941,7 @@
           <a:bodyPr wrap="square" lIns="0" tIns="0" rIns="0" bIns="0" rtlCol="0" anchor="ctr"/>
           <a:lstStyle/>
           <a:p>
-            <a:pPr indent="0" marL="0">
+            <a:pPr marL="0" indent="0">
               <a:buNone/>
             </a:pPr>
             <a:r>
@@ -10954,7 +10958,7 @@
             <a:endParaRPr lang="en-US" sz="1000" dirty="0"/>
           </a:p>
           <a:p>
-            <a:pPr indent="0" marL="0">
+            <a:pPr marL="0" indent="0">
               <a:buNone/>
             </a:pPr>
             <a:r>
@@ -10993,7 +10997,7 @@
           <a:bodyPr wrap="square" lIns="0" tIns="0" rIns="0" bIns="0" rtlCol="0" anchor="ctr"/>
           <a:lstStyle/>
           <a:p>
-            <a:pPr indent="0" marL="0">
+            <a:pPr marL="0" indent="0">
               <a:buNone/>
             </a:pPr>
             <a:r>
@@ -11010,7 +11014,7 @@
             <a:endParaRPr lang="en-US" sz="950" dirty="0"/>
           </a:p>
           <a:p>
-            <a:pPr indent="0" marL="0">
+            <a:pPr marL="0" indent="0">
               <a:buNone/>
             </a:pPr>
             <a:r>
@@ -11049,7 +11053,7 @@
           <a:bodyPr wrap="square" lIns="0" tIns="0" rIns="0" bIns="0" rtlCol="0" anchor="ctr"/>
           <a:lstStyle/>
           <a:p>
-            <a:pPr algn="ctr" indent="0" marL="0">
+            <a:pPr marL="0" indent="0" algn="ctr">
               <a:buNone/>
             </a:pPr>
             <a:r>
@@ -11090,7 +11094,7 @@
             <a:prstDash val="solid"/>
           </a:ln>
           <a:effectLst>
-            <a:outerShdw sx="100000" sy="100000" kx="0" ky="0" algn="bl" rotWithShape="0" blurRad="101600" dist="38100" dir="2700000">
+            <a:outerShdw blurRad="101600" dist="38100" dir="2700000" algn="bl" rotWithShape="0">
               <a:srgbClr val="000000">
                 <a:alpha val="12000"/>
               </a:srgbClr>
@@ -11119,7 +11123,7 @@
           <a:bodyPr wrap="square" lIns="0" tIns="0" rIns="0" bIns="0" rtlCol="0" anchor="ctr"/>
           <a:lstStyle/>
           <a:p>
-            <a:pPr indent="0" marL="0">
+            <a:pPr marL="0" indent="0">
               <a:buNone/>
             </a:pPr>
             <a:r>
@@ -11163,7 +11167,7 @@
             <a:prstDash val="solid"/>
           </a:ln>
           <a:effectLst>
-            <a:outerShdw sx="100000" sy="100000" kx="0" ky="0" algn="bl" rotWithShape="0" blurRad="101600" dist="38100" dir="2700000">
+            <a:outerShdw blurRad="101600" dist="38100" dir="2700000" algn="bl" rotWithShape="0">
               <a:srgbClr val="000000">
                 <a:alpha val="12000"/>
               </a:srgbClr>
@@ -11192,7 +11196,7 @@
           <a:bodyPr wrap="square" lIns="0" tIns="0" rIns="0" bIns="0" rtlCol="0" anchor="ctr"/>
           <a:lstStyle/>
           <a:p>
-            <a:pPr algn="ctr" indent="0" marL="0">
+            <a:pPr marL="0" indent="0" algn="ctr">
               <a:buNone/>
             </a:pPr>
             <a:r>
@@ -11236,7 +11240,7 @@
             <a:prstDash val="solid"/>
           </a:ln>
           <a:effectLst>
-            <a:outerShdw sx="100000" sy="100000" kx="0" ky="0" algn="bl" rotWithShape="0" blurRad="101600" dist="38100" dir="2700000">
+            <a:outerShdw blurRad="101600" dist="38100" dir="2700000" algn="bl" rotWithShape="0">
               <a:srgbClr val="000000">
                 <a:alpha val="12000"/>
               </a:srgbClr>
@@ -11265,7 +11269,7 @@
           <a:bodyPr wrap="square" lIns="0" tIns="0" rIns="0" bIns="0" rtlCol="0" anchor="ctr"/>
           <a:lstStyle/>
           <a:p>
-            <a:pPr algn="ctr" indent="0" marL="0">
+            <a:pPr marL="0" indent="0" algn="ctr">
               <a:buNone/>
             </a:pPr>
             <a:r>
@@ -11309,7 +11313,7 @@
             <a:prstDash val="solid"/>
           </a:ln>
           <a:effectLst>
-            <a:outerShdw sx="100000" sy="100000" kx="0" ky="0" algn="bl" rotWithShape="0" blurRad="101600" dist="38100" dir="2700000">
+            <a:outerShdw blurRad="101600" dist="38100" dir="2700000" algn="bl" rotWithShape="0">
               <a:srgbClr val="000000">
                 <a:alpha val="12000"/>
               </a:srgbClr>
@@ -11338,7 +11342,7 @@
           <a:bodyPr wrap="square" lIns="0" tIns="0" rIns="0" bIns="0" rtlCol="0" anchor="ctr"/>
           <a:lstStyle/>
           <a:p>
-            <a:pPr algn="ctr" indent="0" marL="0">
+            <a:pPr marL="0" indent="0" algn="ctr">
               <a:buNone/>
             </a:pPr>
             <a:r>
@@ -11382,7 +11386,7 @@
             <a:prstDash val="solid"/>
           </a:ln>
           <a:effectLst>
-            <a:outerShdw sx="100000" sy="100000" kx="0" ky="0" algn="bl" rotWithShape="0" blurRad="101600" dist="38100" dir="2700000">
+            <a:outerShdw blurRad="101600" dist="38100" dir="2700000" algn="bl" rotWithShape="0">
               <a:srgbClr val="000000">
                 <a:alpha val="12000"/>
               </a:srgbClr>
@@ -11411,7 +11415,7 @@
           <a:bodyPr wrap="square" lIns="0" tIns="0" rIns="0" bIns="0" rtlCol="0" anchor="ctr"/>
           <a:lstStyle/>
           <a:p>
-            <a:pPr indent="0" marL="0">
+            <a:pPr marL="0" indent="0">
               <a:buNone/>
             </a:pPr>
             <a:r>
@@ -11450,7 +11454,7 @@
           <a:bodyPr wrap="square" lIns="0" tIns="0" rIns="0" bIns="0" rtlCol="0" anchor="ctr"/>
           <a:lstStyle/>
           <a:p>
-            <a:pPr indent="0" marL="0">
+            <a:pPr marL="0" indent="0">
               <a:buNone/>
             </a:pPr>
             <a:r>
@@ -11514,7 +11518,7 @@
           <a:bodyPr wrap="square" lIns="0" tIns="0" rIns="0" bIns="0" rtlCol="0" anchor="ctr"/>
           <a:lstStyle/>
           <a:p>
-            <a:pPr algn="ctr" indent="0" marL="0">
+            <a:pPr marL="0" indent="0" algn="ctr">
               <a:buNone/>
             </a:pPr>
             <a:r>
@@ -11548,6 +11552,7 @@
         <a:solidFill>
           <a:srgbClr val="FFFFFF"/>
         </a:solidFill>
+        <a:effectLst/>
       </p:bgPr>
     </p:bg>
     <p:spTree>
@@ -11610,7 +11615,7 @@
           <a:bodyPr wrap="square" lIns="0" tIns="0" rIns="0" bIns="0" rtlCol="0" anchor="ctr"/>
           <a:lstStyle/>
           <a:p>
-            <a:pPr indent="0" marL="0">
+            <a:pPr marL="0" indent="0">
               <a:buNone/>
             </a:pPr>
             <a:r>
@@ -11676,7 +11681,7 @@
           <a:bodyPr wrap="square" lIns="0" tIns="0" rIns="0" bIns="0" rtlCol="0" anchor="ctr"/>
           <a:lstStyle/>
           <a:p>
-            <a:pPr algn="ctr" indent="0" marL="0">
+            <a:pPr marL="0" indent="0" algn="ctr">
               <a:buNone/>
             </a:pPr>
             <a:r>
@@ -11720,7 +11725,7 @@
             <a:prstDash val="solid"/>
           </a:ln>
           <a:effectLst>
-            <a:outerShdw sx="100000" sy="100000" kx="0" ky="0" algn="bl" rotWithShape="0" blurRad="101600" dist="38100" dir="2700000">
+            <a:outerShdw blurRad="101600" dist="38100" dir="2700000" algn="bl" rotWithShape="0">
               <a:srgbClr val="000000">
                 <a:alpha val="12000"/>
               </a:srgbClr>
@@ -11749,7 +11754,7 @@
           <a:bodyPr wrap="square" lIns="0" tIns="0" rIns="0" bIns="0" rtlCol="0" anchor="ctr"/>
           <a:lstStyle/>
           <a:p>
-            <a:pPr indent="0" marL="0">
+            <a:pPr marL="0" indent="0">
               <a:buNone/>
             </a:pPr>
             <a:r>
@@ -11788,7 +11793,7 @@
           <a:bodyPr wrap="square" lIns="0" tIns="0" rIns="0" bIns="0" rtlCol="0" anchor="ctr"/>
           <a:lstStyle/>
           <a:p>
-            <a:pPr indent="0" marL="0">
+            <a:pPr marL="0" indent="0">
               <a:buNone/>
             </a:pPr>
             <a:r>
@@ -11827,7 +11832,7 @@
           <a:bodyPr wrap="square" lIns="0" tIns="0" rIns="0" bIns="0" rtlCol="0" anchor="ctr"/>
           <a:lstStyle/>
           <a:p>
-            <a:pPr indent="0" marL="0">
+            <a:pPr marL="0" indent="0">
               <a:buNone/>
             </a:pPr>
             <a:r>
@@ -11866,7 +11871,7 @@
           <a:bodyPr wrap="square" lIns="0" tIns="0" rIns="0" bIns="0" rtlCol="0" anchor="ctr"/>
           <a:lstStyle/>
           <a:p>
-            <a:pPr indent="0" marL="0">
+            <a:pPr marL="0" indent="0">
               <a:buNone/>
             </a:pPr>
             <a:r>
@@ -11905,7 +11910,7 @@
           <a:bodyPr wrap="square" lIns="0" tIns="0" rIns="0" bIns="0" rtlCol="0" anchor="ctr"/>
           <a:lstStyle/>
           <a:p>
-            <a:pPr indent="0" marL="0">
+            <a:pPr marL="0" indent="0">
               <a:buNone/>
             </a:pPr>
             <a:r>
@@ -11944,7 +11949,7 @@
           <a:bodyPr wrap="square" lIns="0" tIns="0" rIns="0" bIns="0" rtlCol="0" anchor="ctr"/>
           <a:lstStyle/>
           <a:p>
-            <a:pPr indent="0" marL="0">
+            <a:pPr marL="0" indent="0">
               <a:buNone/>
             </a:pPr>
             <a:r>
@@ -11983,7 +11988,7 @@
           <a:bodyPr wrap="square" lIns="0" tIns="0" rIns="0" bIns="0" rtlCol="0" anchor="ctr"/>
           <a:lstStyle/>
           <a:p>
-            <a:pPr indent="0" marL="0">
+            <a:pPr marL="0" indent="0">
               <a:buNone/>
             </a:pPr>
             <a:r>
@@ -12022,7 +12027,7 @@
           <a:bodyPr wrap="square" lIns="0" tIns="0" rIns="0" bIns="0" rtlCol="0" anchor="ctr"/>
           <a:lstStyle/>
           <a:p>
-            <a:pPr indent="0" marL="0">
+            <a:pPr marL="0" indent="0">
               <a:buNone/>
             </a:pPr>
             <a:r>
@@ -12061,7 +12066,7 @@
           <a:bodyPr wrap="square" lIns="0" tIns="0" rIns="0" bIns="0" rtlCol="0" anchor="ctr"/>
           <a:lstStyle/>
           <a:p>
-            <a:pPr indent="0" marL="0">
+            <a:pPr marL="0" indent="0">
               <a:buNone/>
             </a:pPr>
             <a:r>
@@ -12100,7 +12105,7 @@
           <a:bodyPr wrap="square" lIns="0" tIns="0" rIns="0" bIns="0" rtlCol="0" anchor="ctr"/>
           <a:lstStyle/>
           <a:p>
-            <a:pPr indent="0" marL="0">
+            <a:pPr marL="0" indent="0">
               <a:buNone/>
             </a:pPr>
             <a:r>
@@ -12139,7 +12144,7 @@
           <a:bodyPr wrap="square" lIns="0" tIns="0" rIns="0" bIns="0" rtlCol="0" anchor="ctr"/>
           <a:lstStyle/>
           <a:p>
-            <a:pPr indent="0" marL="0">
+            <a:pPr marL="0" indent="0">
               <a:buNone/>
             </a:pPr>
             <a:r>
@@ -12178,7 +12183,7 @@
           <a:bodyPr wrap="square" lIns="0" tIns="0" rIns="0" bIns="0" rtlCol="0" anchor="ctr"/>
           <a:lstStyle/>
           <a:p>
-            <a:pPr indent="0" marL="0">
+            <a:pPr marL="0" indent="0">
               <a:buNone/>
             </a:pPr>
             <a:r>
@@ -12217,7 +12222,7 @@
           <a:bodyPr wrap="square" lIns="0" tIns="0" rIns="0" bIns="0" rtlCol="0" anchor="ctr"/>
           <a:lstStyle/>
           <a:p>
-            <a:pPr indent="0" marL="0">
+            <a:pPr marL="0" indent="0">
               <a:buNone/>
             </a:pPr>
             <a:r>
@@ -12256,7 +12261,7 @@
           <a:bodyPr wrap="square" lIns="0" tIns="0" rIns="0" bIns="0" rtlCol="0" anchor="ctr"/>
           <a:lstStyle/>
           <a:p>
-            <a:pPr indent="0" marL="0">
+            <a:pPr marL="0" indent="0">
               <a:buNone/>
             </a:pPr>
             <a:r>
@@ -12295,7 +12300,7 @@
           <a:bodyPr wrap="square" lIns="0" tIns="0" rIns="0" bIns="0" rtlCol="0" anchor="ctr"/>
           <a:lstStyle/>
           <a:p>
-            <a:pPr indent="0" marL="0">
+            <a:pPr marL="0" indent="0">
               <a:buNone/>
             </a:pPr>
             <a:r>
@@ -12334,7 +12339,7 @@
           <a:bodyPr wrap="square" lIns="0" tIns="0" rIns="0" bIns="0" rtlCol="0" anchor="ctr"/>
           <a:lstStyle/>
           <a:p>
-            <a:pPr indent="0" marL="0">
+            <a:pPr marL="0" indent="0">
               <a:buNone/>
             </a:pPr>
             <a:r>
@@ -12373,7 +12378,7 @@
           <a:bodyPr wrap="square" lIns="0" tIns="0" rIns="0" bIns="0" rtlCol="0" anchor="ctr"/>
           <a:lstStyle/>
           <a:p>
-            <a:pPr indent="0" marL="0">
+            <a:pPr marL="0" indent="0">
               <a:buNone/>
             </a:pPr>
             <a:r>
@@ -12412,7 +12417,7 @@
           <a:bodyPr wrap="square" lIns="0" tIns="0" rIns="0" bIns="0" rtlCol="0" anchor="ctr"/>
           <a:lstStyle/>
           <a:p>
-            <a:pPr indent="0" marL="0">
+            <a:pPr marL="0" indent="0">
               <a:buNone/>
             </a:pPr>
             <a:r>
@@ -12451,7 +12456,7 @@
           <a:bodyPr wrap="square" lIns="0" tIns="0" rIns="0" bIns="0" rtlCol="0" anchor="ctr"/>
           <a:lstStyle/>
           <a:p>
-            <a:pPr indent="0" marL="0">
+            <a:pPr marL="0" indent="0">
               <a:buNone/>
             </a:pPr>
             <a:r>
@@ -12490,7 +12495,7 @@
           <a:bodyPr wrap="square" lIns="0" tIns="0" rIns="0" bIns="0" rtlCol="0" anchor="ctr"/>
           <a:lstStyle/>
           <a:p>
-            <a:pPr indent="0" marL="0">
+            <a:pPr marL="0" indent="0">
               <a:buNone/>
             </a:pPr>
             <a:r>
@@ -12554,7 +12559,7 @@
           <a:bodyPr wrap="square" lIns="0" tIns="0" rIns="0" bIns="0" rtlCol="0" anchor="ctr"/>
           <a:lstStyle/>
           <a:p>
-            <a:pPr algn="ctr" indent="0" marL="0">
+            <a:pPr marL="0" indent="0" algn="ctr">
               <a:buNone/>
             </a:pPr>
             <a:r>
@@ -12593,7 +12598,7 @@
           <a:bodyPr wrap="square" lIns="0" tIns="0" rIns="0" bIns="0" rtlCol="0" anchor="ctr"/>
           <a:lstStyle/>
           <a:p>
-            <a:pPr indent="0" marL="0">
+            <a:pPr marL="0" indent="0">
               <a:buNone/>
             </a:pPr>
             <a:r>
@@ -12632,7 +12637,7 @@
           <a:bodyPr wrap="square" lIns="0" tIns="0" rIns="0" bIns="0" rtlCol="0" anchor="ctr"/>
           <a:lstStyle/>
           <a:p>
-            <a:pPr indent="0" marL="0">
+            <a:pPr marL="0" indent="0">
               <a:buNone/>
             </a:pPr>
             <a:r>
@@ -12696,7 +12701,7 @@
           <a:bodyPr wrap="square" lIns="0" tIns="0" rIns="0" bIns="0" rtlCol="0" anchor="ctr"/>
           <a:lstStyle/>
           <a:p>
-            <a:pPr algn="ctr" indent="0" marL="0">
+            <a:pPr marL="0" indent="0" algn="ctr">
               <a:buNone/>
             </a:pPr>
             <a:r>
@@ -12735,7 +12740,7 @@
           <a:bodyPr wrap="square" lIns="0" tIns="0" rIns="0" bIns="0" rtlCol="0" anchor="ctr"/>
           <a:lstStyle/>
           <a:p>
-            <a:pPr indent="0" marL="0">
+            <a:pPr marL="0" indent="0">
               <a:buNone/>
             </a:pPr>
             <a:r>
@@ -12774,7 +12779,7 @@
           <a:bodyPr wrap="square" lIns="0" tIns="0" rIns="0" bIns="0" rtlCol="0" anchor="ctr"/>
           <a:lstStyle/>
           <a:p>
-            <a:pPr indent="0" marL="0">
+            <a:pPr marL="0" indent="0">
               <a:buNone/>
             </a:pPr>
             <a:r>
@@ -12838,7 +12843,7 @@
           <a:bodyPr wrap="square" lIns="0" tIns="0" rIns="0" bIns="0" rtlCol="0" anchor="ctr"/>
           <a:lstStyle/>
           <a:p>
-            <a:pPr algn="ctr" indent="0" marL="0">
+            <a:pPr marL="0" indent="0" algn="ctr">
               <a:buNone/>
             </a:pPr>
             <a:r>
@@ -12877,7 +12882,7 @@
           <a:bodyPr wrap="square" lIns="0" tIns="0" rIns="0" bIns="0" rtlCol="0" anchor="ctr"/>
           <a:lstStyle/>
           <a:p>
-            <a:pPr indent="0" marL="0">
+            <a:pPr marL="0" indent="0">
               <a:buNone/>
             </a:pPr>
             <a:r>
@@ -12916,7 +12921,7 @@
           <a:bodyPr wrap="square" lIns="0" tIns="0" rIns="0" bIns="0" rtlCol="0" anchor="ctr"/>
           <a:lstStyle/>
           <a:p>
-            <a:pPr indent="0" marL="0">
+            <a:pPr marL="0" indent="0">
               <a:buNone/>
             </a:pPr>
             <a:r>
@@ -12980,7 +12985,7 @@
           <a:bodyPr wrap="square" lIns="0" tIns="0" rIns="0" bIns="0" rtlCol="0" anchor="ctr"/>
           <a:lstStyle/>
           <a:p>
-            <a:pPr algn="ctr" indent="0" marL="0">
+            <a:pPr marL="0" indent="0" algn="ctr">
               <a:buNone/>
             </a:pPr>
             <a:r>
@@ -13019,7 +13024,7 @@
           <a:bodyPr wrap="square" lIns="0" tIns="0" rIns="0" bIns="0" rtlCol="0" anchor="ctr"/>
           <a:lstStyle/>
           <a:p>
-            <a:pPr indent="0" marL="0">
+            <a:pPr marL="0" indent="0">
               <a:buNone/>
             </a:pPr>
             <a:r>
@@ -13058,7 +13063,7 @@
           <a:bodyPr wrap="square" lIns="0" tIns="0" rIns="0" bIns="0" rtlCol="0" anchor="ctr"/>
           <a:lstStyle/>
           <a:p>
-            <a:pPr indent="0" marL="0">
+            <a:pPr marL="0" indent="0">
               <a:buNone/>
             </a:pPr>
             <a:r>
@@ -13122,7 +13127,7 @@
           <a:bodyPr wrap="square" lIns="0" tIns="0" rIns="0" bIns="0" rtlCol="0" anchor="ctr"/>
           <a:lstStyle/>
           <a:p>
-            <a:pPr algn="ctr" indent="0" marL="0">
+            <a:pPr marL="0" indent="0" algn="ctr">
               <a:buNone/>
             </a:pPr>
             <a:r>
@@ -13161,7 +13166,7 @@
           <a:bodyPr wrap="square" lIns="0" tIns="0" rIns="0" bIns="0" rtlCol="0" anchor="ctr"/>
           <a:lstStyle/>
           <a:p>
-            <a:pPr indent="0" marL="0">
+            <a:pPr marL="0" indent="0">
               <a:buNone/>
             </a:pPr>
             <a:r>
@@ -13200,7 +13205,7 @@
           <a:bodyPr wrap="square" lIns="0" tIns="0" rIns="0" bIns="0" rtlCol="0" anchor="ctr"/>
           <a:lstStyle/>
           <a:p>
-            <a:pPr indent="0" marL="0">
+            <a:pPr marL="0" indent="0">
               <a:buNone/>
             </a:pPr>
             <a:r>
@@ -13264,7 +13269,7 @@
           <a:bodyPr wrap="square" lIns="0" tIns="0" rIns="0" bIns="0" rtlCol="0" anchor="ctr"/>
           <a:lstStyle/>
           <a:p>
-            <a:pPr algn="ctr" indent="0" marL="0">
+            <a:pPr marL="0" indent="0" algn="ctr">
               <a:buNone/>
             </a:pPr>
             <a:r>
@@ -13303,7 +13308,7 @@
           <a:bodyPr wrap="square" lIns="0" tIns="0" rIns="0" bIns="0" rtlCol="0" anchor="ctr"/>
           <a:lstStyle/>
           <a:p>
-            <a:pPr indent="0" marL="0">
+            <a:pPr marL="0" indent="0">
               <a:buNone/>
             </a:pPr>
             <a:r>
@@ -13342,7 +13347,7 @@
           <a:bodyPr wrap="square" lIns="0" tIns="0" rIns="0" bIns="0" rtlCol="0" anchor="ctr"/>
           <a:lstStyle/>
           <a:p>
-            <a:pPr indent="0" marL="0">
+            <a:pPr marL="0" indent="0">
               <a:buNone/>
             </a:pPr>
             <a:r>
@@ -13406,7 +13411,7 @@
           <a:bodyPr wrap="square" lIns="0" tIns="0" rIns="0" bIns="0" rtlCol="0" anchor="ctr"/>
           <a:lstStyle/>
           <a:p>
-            <a:pPr algn="ctr" indent="0" marL="0">
+            <a:pPr marL="0" indent="0" algn="ctr">
               <a:buNone/>
             </a:pPr>
             <a:r>
@@ -13440,6 +13445,7 @@
         <a:solidFill>
           <a:srgbClr val="FFFFFF"/>
         </a:solidFill>
+        <a:effectLst/>
       </p:bgPr>
     </p:bg>
     <p:spTree>
@@ -13502,7 +13508,7 @@
           <a:bodyPr wrap="square" lIns="0" tIns="0" rIns="0" bIns="0" rtlCol="0" anchor="ctr"/>
           <a:lstStyle/>
           <a:p>
-            <a:pPr indent="0" marL="0">
+            <a:pPr marL="0" indent="0">
               <a:buNone/>
             </a:pPr>
             <a:r>
@@ -13568,7 +13574,7 @@
           <a:bodyPr wrap="square" lIns="0" tIns="0" rIns="0" bIns="0" rtlCol="0" anchor="ctr"/>
           <a:lstStyle/>
           <a:p>
-            <a:pPr algn="ctr" indent="0" marL="0">
+            <a:pPr marL="0" indent="0" algn="ctr">
               <a:buNone/>
             </a:pPr>
             <a:r>
@@ -13607,7 +13613,7 @@
           <a:bodyPr wrap="square" lIns="0" tIns="0" rIns="0" bIns="0" rtlCol="0" anchor="ctr"/>
           <a:lstStyle/>
           <a:p>
-            <a:pPr indent="0" marL="0">
+            <a:pPr marL="0" indent="0">
               <a:buNone/>
             </a:pPr>
             <a:r>
@@ -13651,7 +13657,7 @@
             <a:prstDash val="solid"/>
           </a:ln>
           <a:effectLst>
-            <a:outerShdw sx="100000" sy="100000" kx="0" ky="0" algn="bl" rotWithShape="0" blurRad="101600" dist="38100" dir="2700000">
+            <a:outerShdw blurRad="101600" dist="38100" dir="2700000" algn="bl" rotWithShape="0">
               <a:srgbClr val="000000">
                 <a:alpha val="12000"/>
               </a:srgbClr>
@@ -13680,7 +13686,7 @@
           <a:bodyPr wrap="square" lIns="0" tIns="0" rIns="0" bIns="0" rtlCol="0" anchor="ctr"/>
           <a:lstStyle/>
           <a:p>
-            <a:pPr indent="0" marL="0">
+            <a:pPr marL="0" indent="0">
               <a:buNone/>
             </a:pPr>
             <a:r>
@@ -13719,7 +13725,7 @@
           <a:bodyPr wrap="square" lIns="0" tIns="0" rIns="0" bIns="0" rtlCol="0" anchor="ctr"/>
           <a:lstStyle/>
           <a:p>
-            <a:pPr indent="0" marL="0">
+            <a:pPr marL="0" indent="0">
               <a:buNone/>
             </a:pPr>
             <a:r>
@@ -13763,7 +13769,7 @@
             <a:prstDash val="solid"/>
           </a:ln>
           <a:effectLst>
-            <a:outerShdw sx="100000" sy="100000" kx="0" ky="0" algn="bl" rotWithShape="0" blurRad="101600" dist="38100" dir="2700000">
+            <a:outerShdw blurRad="101600" dist="38100" dir="2700000" algn="bl" rotWithShape="0">
               <a:srgbClr val="000000">
                 <a:alpha val="12000"/>
               </a:srgbClr>
@@ -13792,7 +13798,7 @@
           <a:bodyPr wrap="square" lIns="0" tIns="0" rIns="0" bIns="0" rtlCol="0" anchor="ctr"/>
           <a:lstStyle/>
           <a:p>
-            <a:pPr indent="0" marL="0">
+            <a:pPr marL="0" indent="0">
               <a:buNone/>
             </a:pPr>
             <a:r>
@@ -13831,7 +13837,7 @@
           <a:bodyPr wrap="square" lIns="0" tIns="0" rIns="0" bIns="0" rtlCol="0" anchor="ctr"/>
           <a:lstStyle/>
           <a:p>
-            <a:pPr indent="0" marL="0">
+            <a:pPr marL="0" indent="0">
               <a:buNone/>
             </a:pPr>
             <a:r>
@@ -13875,7 +13881,7 @@
             <a:prstDash val="solid"/>
           </a:ln>
           <a:effectLst>
-            <a:outerShdw sx="100000" sy="100000" kx="0" ky="0" algn="bl" rotWithShape="0" blurRad="101600" dist="38100" dir="2700000">
+            <a:outerShdw blurRad="101600" dist="38100" dir="2700000" algn="bl" rotWithShape="0">
               <a:srgbClr val="000000">
                 <a:alpha val="12000"/>
               </a:srgbClr>
@@ -13904,7 +13910,7 @@
           <a:bodyPr wrap="square" lIns="0" tIns="0" rIns="0" bIns="0" rtlCol="0" anchor="ctr"/>
           <a:lstStyle/>
           <a:p>
-            <a:pPr indent="0" marL="0">
+            <a:pPr marL="0" indent="0">
               <a:buNone/>
             </a:pPr>
             <a:r>
@@ -13943,7 +13949,7 @@
           <a:bodyPr wrap="square" lIns="0" tIns="0" rIns="0" bIns="0" rtlCol="0" anchor="ctr"/>
           <a:lstStyle/>
           <a:p>
-            <a:pPr indent="0" marL="0">
+            <a:pPr marL="0" indent="0">
               <a:buNone/>
             </a:pPr>
             <a:r>
@@ -13982,7 +13988,7 @@
           <a:bodyPr wrap="square" lIns="0" tIns="0" rIns="0" bIns="0" rtlCol="0" anchor="ctr"/>
           <a:lstStyle/>
           <a:p>
-            <a:pPr indent="0" marL="0">
+            <a:pPr marL="0" indent="0">
               <a:buNone/>
             </a:pPr>
             <a:r>
@@ -14026,7 +14032,7 @@
             <a:prstDash val="solid"/>
           </a:ln>
           <a:effectLst>
-            <a:outerShdw sx="100000" sy="100000" kx="0" ky="0" algn="bl" rotWithShape="0" blurRad="101600" dist="38100" dir="2700000">
+            <a:outerShdw blurRad="101600" dist="38100" dir="2700000" algn="bl" rotWithShape="0">
               <a:srgbClr val="000000">
                 <a:alpha val="12000"/>
               </a:srgbClr>
@@ -14055,7 +14061,7 @@
           <a:bodyPr wrap="square" lIns="0" tIns="0" rIns="0" bIns="0" rtlCol="0" anchor="ctr"/>
           <a:lstStyle/>
           <a:p>
-            <a:pPr algn="ctr" indent="0" marL="0">
+            <a:pPr marL="0" indent="0" algn="ctr">
               <a:buNone/>
             </a:pPr>
             <a:r>
@@ -14072,7 +14078,7 @@
             <a:endParaRPr lang="en-US" sz="1000" dirty="0"/>
           </a:p>
           <a:p>
-            <a:pPr algn="ctr" indent="0" marL="0">
+            <a:pPr marL="0" indent="0" algn="ctr">
               <a:buNone/>
             </a:pPr>
             <a:r>
@@ -14111,7 +14117,7 @@
           <a:bodyPr wrap="square" lIns="0" tIns="0" rIns="0" bIns="0" rtlCol="0" anchor="ctr"/>
           <a:lstStyle/>
           <a:p>
-            <a:pPr algn="ctr" indent="0" marL="0">
+            <a:pPr marL="0" indent="0" algn="ctr">
               <a:buNone/>
             </a:pPr>
             <a:r>
@@ -14152,7 +14158,7 @@
             <a:prstDash val="solid"/>
           </a:ln>
           <a:effectLst>
-            <a:outerShdw sx="100000" sy="100000" kx="0" ky="0" algn="bl" rotWithShape="0" blurRad="101600" dist="38100" dir="2700000">
+            <a:outerShdw blurRad="101600" dist="38100" dir="2700000" algn="bl" rotWithShape="0">
               <a:srgbClr val="000000">
                 <a:alpha val="12000"/>
               </a:srgbClr>
@@ -14181,7 +14187,7 @@
           <a:bodyPr wrap="square" lIns="0" tIns="0" rIns="0" bIns="0" rtlCol="0" anchor="ctr"/>
           <a:lstStyle/>
           <a:p>
-            <a:pPr algn="ctr" indent="0" marL="0">
+            <a:pPr marL="0" indent="0" algn="ctr">
               <a:buNone/>
             </a:pPr>
             <a:r>
@@ -14198,7 +14204,7 @@
             <a:endParaRPr lang="en-US" sz="1000" dirty="0"/>
           </a:p>
           <a:p>
-            <a:pPr algn="ctr" indent="0" marL="0">
+            <a:pPr marL="0" indent="0" algn="ctr">
               <a:buNone/>
             </a:pPr>
             <a:r>
@@ -14237,7 +14243,7 @@
           <a:bodyPr wrap="square" lIns="0" tIns="0" rIns="0" bIns="0" rtlCol="0" anchor="ctr"/>
           <a:lstStyle/>
           <a:p>
-            <a:pPr algn="ctr" indent="0" marL="0">
+            <a:pPr marL="0" indent="0" algn="ctr">
               <a:buNone/>
             </a:pPr>
             <a:r>
@@ -14278,7 +14284,7 @@
             <a:prstDash val="solid"/>
           </a:ln>
           <a:effectLst>
-            <a:outerShdw sx="100000" sy="100000" kx="0" ky="0" algn="bl" rotWithShape="0" blurRad="101600" dist="38100" dir="2700000">
+            <a:outerShdw blurRad="101600" dist="38100" dir="2700000" algn="bl" rotWithShape="0">
               <a:srgbClr val="000000">
                 <a:alpha val="12000"/>
               </a:srgbClr>
@@ -14307,7 +14313,7 @@
           <a:bodyPr wrap="square" lIns="0" tIns="0" rIns="0" bIns="0" rtlCol="0" anchor="ctr"/>
           <a:lstStyle/>
           <a:p>
-            <a:pPr algn="ctr" indent="0" marL="0">
+            <a:pPr marL="0" indent="0" algn="ctr">
               <a:buNone/>
             </a:pPr>
             <a:r>
@@ -14324,7 +14330,7 @@
             <a:endParaRPr lang="en-US" sz="1000" dirty="0"/>
           </a:p>
           <a:p>
-            <a:pPr algn="ctr" indent="0" marL="0">
+            <a:pPr marL="0" indent="0" algn="ctr">
               <a:buNone/>
             </a:pPr>
             <a:r>
@@ -14363,7 +14369,7 @@
           <a:bodyPr wrap="square" lIns="0" tIns="0" rIns="0" bIns="0" rtlCol="0" anchor="ctr"/>
           <a:lstStyle/>
           <a:p>
-            <a:pPr algn="ctr" indent="0" marL="0">
+            <a:pPr marL="0" indent="0" algn="ctr">
               <a:buNone/>
             </a:pPr>
             <a:r>
@@ -14404,7 +14410,7 @@
             <a:prstDash val="solid"/>
           </a:ln>
           <a:effectLst>
-            <a:outerShdw sx="100000" sy="100000" kx="0" ky="0" algn="bl" rotWithShape="0" blurRad="101600" dist="38100" dir="2700000">
+            <a:outerShdw blurRad="101600" dist="38100" dir="2700000" algn="bl" rotWithShape="0">
               <a:srgbClr val="000000">
                 <a:alpha val="12000"/>
               </a:srgbClr>
@@ -14433,7 +14439,7 @@
           <a:bodyPr wrap="square" lIns="0" tIns="0" rIns="0" bIns="0" rtlCol="0" anchor="ctr"/>
           <a:lstStyle/>
           <a:p>
-            <a:pPr algn="ctr" indent="0" marL="0">
+            <a:pPr marL="0" indent="0" algn="ctr">
               <a:buNone/>
             </a:pPr>
             <a:r>
@@ -14450,7 +14456,7 @@
             <a:endParaRPr lang="en-US" sz="1000" dirty="0"/>
           </a:p>
           <a:p>
-            <a:pPr algn="ctr" indent="0" marL="0">
+            <a:pPr marL="0" indent="0" algn="ctr">
               <a:buNone/>
             </a:pPr>
             <a:r>
@@ -14489,7 +14495,7 @@
           <a:bodyPr wrap="square" lIns="0" tIns="0" rIns="0" bIns="0" rtlCol="0" anchor="ctr"/>
           <a:lstStyle/>
           <a:p>
-            <a:pPr algn="ctr" indent="0" marL="0">
+            <a:pPr marL="0" indent="0" algn="ctr">
               <a:buNone/>
             </a:pPr>
             <a:r>
@@ -14530,7 +14536,7 @@
             <a:prstDash val="solid"/>
           </a:ln>
           <a:effectLst>
-            <a:outerShdw sx="100000" sy="100000" kx="0" ky="0" algn="bl" rotWithShape="0" blurRad="101600" dist="38100" dir="2700000">
+            <a:outerShdw blurRad="101600" dist="38100" dir="2700000" algn="bl" rotWithShape="0">
               <a:srgbClr val="000000">
                 <a:alpha val="12000"/>
               </a:srgbClr>
@@ -14559,7 +14565,7 @@
           <a:bodyPr wrap="square" lIns="0" tIns="0" rIns="0" bIns="0" rtlCol="0" anchor="ctr"/>
           <a:lstStyle/>
           <a:p>
-            <a:pPr algn="ctr" indent="0" marL="0">
+            <a:pPr marL="0" indent="0" algn="ctr">
               <a:buNone/>
             </a:pPr>
             <a:r>
@@ -14576,7 +14582,7 @@
             <a:endParaRPr lang="en-US" sz="1000" dirty="0"/>
           </a:p>
           <a:p>
-            <a:pPr algn="ctr" indent="0" marL="0">
+            <a:pPr marL="0" indent="0" algn="ctr">
               <a:buNone/>
             </a:pPr>
             <a:r>
@@ -14620,7 +14626,7 @@
             <a:prstDash val="solid"/>
           </a:ln>
           <a:effectLst>
-            <a:outerShdw sx="100000" sy="100000" kx="0" ky="0" algn="bl" rotWithShape="0" blurRad="101600" dist="38100" dir="2700000">
+            <a:outerShdw blurRad="101600" dist="38100" dir="2700000" algn="bl" rotWithShape="0">
               <a:srgbClr val="000000">
                 <a:alpha val="12000"/>
               </a:srgbClr>
@@ -14649,7 +14655,7 @@
           <a:bodyPr wrap="square" lIns="0" tIns="0" rIns="0" bIns="0" rtlCol="0" anchor="ctr"/>
           <a:lstStyle/>
           <a:p>
-            <a:pPr indent="0" marL="0">
+            <a:pPr marL="0" indent="0">
               <a:buNone/>
             </a:pPr>
             <a:r>
@@ -14713,7 +14719,7 @@
           <a:bodyPr wrap="square" lIns="0" tIns="0" rIns="0" bIns="0" rtlCol="0" anchor="ctr"/>
           <a:lstStyle/>
           <a:p>
-            <a:pPr algn="ctr" indent="0" marL="0">
+            <a:pPr marL="0" indent="0" algn="ctr">
               <a:buNone/>
             </a:pPr>
             <a:r>
@@ -14747,6 +14753,7 @@
         <a:solidFill>
           <a:srgbClr val="0F172A"/>
         </a:solidFill>
+        <a:effectLst/>
       </p:bgPr>
     </p:bg>
     <p:spTree>
@@ -14838,11 +14845,11 @@
           <a:bodyPr wrap="square" lIns="0" tIns="0" rIns="0" bIns="0" rtlCol="0" anchor="ctr"/>
           <a:lstStyle/>
           <a:p>
-            <a:pPr indent="0" marL="0">
-              <a:buNone/>
-            </a:pPr>
-            <a:r>
-              <a:rPr lang="en-US" sz="1200" b="1" spc="400" kern="0" dirty="0">
+            <a:pPr marL="0" indent="0">
+              <a:buNone/>
+            </a:pPr>
+            <a:r>
+              <a:rPr lang="en-US" sz="1200" b="1" kern="0" spc="400" dirty="0">
                 <a:solidFill>
                   <a:srgbClr val="326CE5"/>
                 </a:solidFill>
@@ -14877,7 +14884,7 @@
           <a:bodyPr wrap="square" lIns="0" tIns="0" rIns="0" bIns="0" rtlCol="0" anchor="ctr"/>
           <a:lstStyle/>
           <a:p>
-            <a:pPr indent="0" marL="0">
+            <a:pPr marL="0" indent="0">
               <a:buNone/>
             </a:pPr>
             <a:r>
@@ -14916,7 +14923,7 @@
           <a:bodyPr wrap="square" lIns="0" tIns="0" rIns="0" bIns="0" rtlCol="0" anchor="ctr"/>
           <a:lstStyle/>
           <a:p>
-            <a:pPr indent="0" marL="0">
+            <a:pPr marL="0" indent="0">
               <a:buNone/>
             </a:pPr>
             <a:r>
@@ -14950,6 +14957,7 @@
         <a:solidFill>
           <a:srgbClr val="FFFFFF"/>
         </a:solidFill>
+        <a:effectLst/>
       </p:bgPr>
     </p:bg>
     <p:spTree>
@@ -15012,7 +15020,7 @@
           <a:bodyPr wrap="square" lIns="0" tIns="0" rIns="0" bIns="0" rtlCol="0" anchor="ctr"/>
           <a:lstStyle/>
           <a:p>
-            <a:pPr indent="0" marL="0">
+            <a:pPr marL="0" indent="0">
               <a:buNone/>
             </a:pPr>
             <a:r>
@@ -15078,7 +15086,7 @@
           <a:bodyPr wrap="square" lIns="0" tIns="0" rIns="0" bIns="0" rtlCol="0" anchor="ctr"/>
           <a:lstStyle/>
           <a:p>
-            <a:pPr algn="ctr" indent="0" marL="0">
+            <a:pPr marL="0" indent="0" algn="ctr">
               <a:buNone/>
             </a:pPr>
             <a:r>
@@ -15122,7 +15130,7 @@
             <a:prstDash val="solid"/>
           </a:ln>
           <a:effectLst>
-            <a:outerShdw sx="100000" sy="100000" kx="0" ky="0" algn="bl" rotWithShape="0" blurRad="101600" dist="38100" dir="2700000">
+            <a:outerShdw blurRad="101600" dist="38100" dir="2700000" algn="bl" rotWithShape="0">
               <a:srgbClr val="000000">
                 <a:alpha val="12000"/>
               </a:srgbClr>
@@ -15151,7 +15159,7 @@
           <a:bodyPr wrap="square" lIns="0" tIns="0" rIns="0" bIns="0" rtlCol="0" anchor="ctr"/>
           <a:lstStyle/>
           <a:p>
-            <a:pPr indent="0" marL="0">
+            <a:pPr marL="0" indent="0">
               <a:buNone/>
             </a:pPr>
             <a:r>
@@ -15190,7 +15198,7 @@
           <a:bodyPr wrap="square" lIns="0" tIns="0" rIns="0" bIns="0" rtlCol="0" anchor="ctr"/>
           <a:lstStyle/>
           <a:p>
-            <a:pPr indent="0" marL="0">
+            <a:pPr marL="0" indent="0">
               <a:buNone/>
             </a:pPr>
             <a:r>
@@ -15234,7 +15242,7 @@
             <a:prstDash val="solid"/>
           </a:ln>
           <a:effectLst>
-            <a:outerShdw sx="100000" sy="100000" kx="0" ky="0" algn="bl" rotWithShape="0" blurRad="101600" dist="38100" dir="2700000">
+            <a:outerShdw blurRad="101600" dist="38100" dir="2700000" algn="bl" rotWithShape="0">
               <a:srgbClr val="000000">
                 <a:alpha val="12000"/>
               </a:srgbClr>
@@ -15263,7 +15271,7 @@
           <a:bodyPr wrap="square" lIns="0" tIns="0" rIns="0" bIns="0" rtlCol="0" anchor="ctr"/>
           <a:lstStyle/>
           <a:p>
-            <a:pPr indent="0" marL="0">
+            <a:pPr marL="0" indent="0">
               <a:buNone/>
             </a:pPr>
             <a:r>
@@ -15302,7 +15310,7 @@
           <a:bodyPr wrap="square" lIns="0" tIns="0" rIns="0" bIns="0" rtlCol="0" anchor="ctr"/>
           <a:lstStyle/>
           <a:p>
-            <a:pPr indent="0" marL="0">
+            <a:pPr marL="0" indent="0">
               <a:buNone/>
             </a:pPr>
             <a:r>
@@ -15346,7 +15354,7 @@
             <a:prstDash val="solid"/>
           </a:ln>
           <a:effectLst>
-            <a:outerShdw sx="100000" sy="100000" kx="0" ky="0" algn="bl" rotWithShape="0" blurRad="101600" dist="38100" dir="2700000">
+            <a:outerShdw blurRad="101600" dist="38100" dir="2700000" algn="bl" rotWithShape="0">
               <a:srgbClr val="000000">
                 <a:alpha val="12000"/>
               </a:srgbClr>
@@ -15402,7 +15410,7 @@
           <a:bodyPr wrap="square" lIns="0" tIns="0" rIns="0" bIns="0" rtlCol="0" anchor="ctr"/>
           <a:lstStyle/>
           <a:p>
-            <a:pPr algn="ctr" indent="0" marL="0">
+            <a:pPr marL="0" indent="0" algn="ctr">
               <a:buNone/>
             </a:pPr>
             <a:r>
@@ -15441,7 +15449,7 @@
           <a:bodyPr wrap="square" lIns="0" tIns="0" rIns="0" bIns="0" rtlCol="0" anchor="ctr"/>
           <a:lstStyle/>
           <a:p>
-            <a:pPr indent="0" marL="0">
+            <a:pPr marL="0" indent="0">
               <a:buNone/>
             </a:pPr>
             <a:r>
@@ -15480,7 +15488,7 @@
           <a:bodyPr wrap="square" lIns="0" tIns="0" rIns="0" bIns="0" rtlCol="0" anchor="ctr"/>
           <a:lstStyle/>
           <a:p>
-            <a:pPr indent="0" marL="0">
+            <a:pPr marL="0" indent="0">
               <a:buNone/>
             </a:pPr>
             <a:r>
@@ -15524,7 +15532,7 @@
             <a:prstDash val="solid"/>
           </a:ln>
           <a:effectLst>
-            <a:outerShdw sx="100000" sy="100000" kx="0" ky="0" algn="bl" rotWithShape="0" blurRad="101600" dist="38100" dir="2700000">
+            <a:outerShdw blurRad="101600" dist="38100" dir="2700000" algn="bl" rotWithShape="0">
               <a:srgbClr val="000000">
                 <a:alpha val="12000"/>
               </a:srgbClr>
@@ -15580,7 +15588,7 @@
           <a:bodyPr wrap="square" lIns="0" tIns="0" rIns="0" bIns="0" rtlCol="0" anchor="ctr"/>
           <a:lstStyle/>
           <a:p>
-            <a:pPr algn="ctr" indent="0" marL="0">
+            <a:pPr marL="0" indent="0" algn="ctr">
               <a:buNone/>
             </a:pPr>
             <a:r>
@@ -15619,7 +15627,7 @@
           <a:bodyPr wrap="square" lIns="0" tIns="0" rIns="0" bIns="0" rtlCol="0" anchor="ctr"/>
           <a:lstStyle/>
           <a:p>
-            <a:pPr indent="0" marL="0">
+            <a:pPr marL="0" indent="0">
               <a:buNone/>
             </a:pPr>
             <a:r>
@@ -15658,7 +15666,7 @@
           <a:bodyPr wrap="square" lIns="0" tIns="0" rIns="0" bIns="0" rtlCol="0" anchor="ctr"/>
           <a:lstStyle/>
           <a:p>
-            <a:pPr indent="0" marL="0">
+            <a:pPr marL="0" indent="0">
               <a:buNone/>
             </a:pPr>
             <a:r>
@@ -15702,7 +15710,7 @@
             <a:prstDash val="solid"/>
           </a:ln>
           <a:effectLst>
-            <a:outerShdw sx="100000" sy="100000" kx="0" ky="0" algn="bl" rotWithShape="0" blurRad="101600" dist="38100" dir="2700000">
+            <a:outerShdw blurRad="101600" dist="38100" dir="2700000" algn="bl" rotWithShape="0">
               <a:srgbClr val="000000">
                 <a:alpha val="12000"/>
               </a:srgbClr>
@@ -15758,7 +15766,7 @@
           <a:bodyPr wrap="square" lIns="0" tIns="0" rIns="0" bIns="0" rtlCol="0" anchor="ctr"/>
           <a:lstStyle/>
           <a:p>
-            <a:pPr algn="ctr" indent="0" marL="0">
+            <a:pPr marL="0" indent="0" algn="ctr">
               <a:buNone/>
             </a:pPr>
             <a:r>
@@ -15797,7 +15805,7 @@
           <a:bodyPr wrap="square" lIns="0" tIns="0" rIns="0" bIns="0" rtlCol="0" anchor="ctr"/>
           <a:lstStyle/>
           <a:p>
-            <a:pPr indent="0" marL="0">
+            <a:pPr marL="0" indent="0">
               <a:buNone/>
             </a:pPr>
             <a:r>
@@ -15836,7 +15844,7 @@
           <a:bodyPr wrap="square" lIns="0" tIns="0" rIns="0" bIns="0" rtlCol="0" anchor="ctr"/>
           <a:lstStyle/>
           <a:p>
-            <a:pPr indent="0" marL="0">
+            <a:pPr marL="0" indent="0">
               <a:buNone/>
             </a:pPr>
             <a:r>
@@ -15900,7 +15908,7 @@
           <a:bodyPr wrap="square" lIns="0" tIns="0" rIns="0" bIns="0" rtlCol="0" anchor="ctr"/>
           <a:lstStyle/>
           <a:p>
-            <a:pPr algn="ctr" indent="0" marL="0">
+            <a:pPr marL="0" indent="0" algn="ctr">
               <a:buNone/>
             </a:pPr>
             <a:r>
@@ -16219,4 +16227,299 @@
     </a:ext>
   </a:extLst>
 </a:theme>
+</file>
+
+<file path=ppt/theme/theme2.xml><?xml version="1.0" encoding="utf-8"?>
+<a:theme xmlns:a="http://schemas.openxmlformats.org/drawingml/2006/main" name="Office Theme">
+  <a:themeElements>
+    <a:clrScheme name="Office">
+      <a:dk1>
+        <a:sysClr val="windowText" lastClr="000000"/>
+      </a:dk1>
+      <a:lt1>
+        <a:sysClr val="window" lastClr="FFFFFF"/>
+      </a:lt1>
+      <a:dk2>
+        <a:srgbClr val="44546A"/>
+      </a:dk2>
+      <a:lt2>
+        <a:srgbClr val="E7E6E6"/>
+      </a:lt2>
+      <a:accent1>
+        <a:srgbClr val="4472C4"/>
+      </a:accent1>
+      <a:accent2>
+        <a:srgbClr val="ED7D31"/>
+      </a:accent2>
+      <a:accent3>
+        <a:srgbClr val="A5A5A5"/>
+      </a:accent3>
+      <a:accent4>
+        <a:srgbClr val="FFC000"/>
+      </a:accent4>
+      <a:accent5>
+        <a:srgbClr val="5B9BD5"/>
+      </a:accent5>
+      <a:accent6>
+        <a:srgbClr val="70AD47"/>
+      </a:accent6>
+      <a:hlink>
+        <a:srgbClr val="0563C1"/>
+      </a:hlink>
+      <a:folHlink>
+        <a:srgbClr val="954F72"/>
+      </a:folHlink>
+    </a:clrScheme>
+    <a:fontScheme name="Office">
+      <a:majorFont>
+        <a:latin typeface="Calibri Light" panose="020F0302020204030204"/>
+        <a:ea typeface=""/>
+        <a:cs typeface=""/>
+        <a:font script="Jpan" typeface="游ゴシック Light"/>
+        <a:font script="Hang" typeface="맑은 고딕"/>
+        <a:font script="Hans" typeface="等线 Light"/>
+        <a:font script="Hant" typeface="新細明體"/>
+        <a:font script="Arab" typeface="Times New Roman"/>
+        <a:font script="Hebr" typeface="Times New Roman"/>
+        <a:font script="Thai" typeface="Angsana New"/>
+        <a:font script="Ethi" typeface="Nyala"/>
+        <a:font script="Beng" typeface="Vrinda"/>
+        <a:font script="Gujr" typeface="Shruti"/>
+        <a:font script="Khmr" typeface="MoolBoran"/>
+        <a:font script="Knda" typeface="Tunga"/>
+        <a:font script="Guru" typeface="Raavi"/>
+        <a:font script="Cans" typeface="Euphemia"/>
+        <a:font script="Cher" typeface="Plantagenet Cherokee"/>
+        <a:font script="Yiii" typeface="Microsoft Yi Baiti"/>
+        <a:font script="Tibt" typeface="Microsoft Himalaya"/>
+        <a:font script="Thaa" typeface="MV Boli"/>
+        <a:font script="Deva" typeface="Mangal"/>
+        <a:font script="Telu" typeface="Gautami"/>
+        <a:font script="Taml" typeface="Latha"/>
+        <a:font script="Syrc" typeface="Estrangelo Edessa"/>
+        <a:font script="Orya" typeface="Kalinga"/>
+        <a:font script="Mlym" typeface="Kartika"/>
+        <a:font script="Laoo" typeface="DokChampa"/>
+        <a:font script="Sinh" typeface="Iskoola Pota"/>
+        <a:font script="Mong" typeface="Mongolian Baiti"/>
+        <a:font script="Viet" typeface="Times New Roman"/>
+        <a:font script="Uigh" typeface="Microsoft Uighur"/>
+        <a:font script="Geor" typeface="Sylfaen"/>
+        <a:font script="Armn" typeface="Arial"/>
+        <a:font script="Bugi" typeface="Leelawadee UI"/>
+        <a:font script="Bopo" typeface="Microsoft JhengHei"/>
+        <a:font script="Java" typeface="Javanese Text"/>
+        <a:font script="Lisu" typeface="Segoe UI"/>
+        <a:font script="Mymr" typeface="Myanmar Text"/>
+        <a:font script="Nkoo" typeface="Ebrima"/>
+        <a:font script="Olck" typeface="Nirmala UI"/>
+        <a:font script="Osma" typeface="Ebrima"/>
+        <a:font script="Phag" typeface="Phagspa"/>
+        <a:font script="Syrn" typeface="Estrangelo Edessa"/>
+        <a:font script="Syrj" typeface="Estrangelo Edessa"/>
+        <a:font script="Syre" typeface="Estrangelo Edessa"/>
+        <a:font script="Sora" typeface="Nirmala UI"/>
+        <a:font script="Tale" typeface="Microsoft Tai Le"/>
+        <a:font script="Talu" typeface="Microsoft New Tai Lue"/>
+        <a:font script="Tfng" typeface="Ebrima"/>
+      </a:majorFont>
+      <a:minorFont>
+        <a:latin typeface="Calibri" panose="020F0502020204030204"/>
+        <a:ea typeface=""/>
+        <a:cs typeface=""/>
+        <a:font script="Jpan" typeface="游ゴシック"/>
+        <a:font script="Hang" typeface="맑은 고딕"/>
+        <a:font script="Hans" typeface="等线"/>
+        <a:font script="Hant" typeface="新細明體"/>
+        <a:font script="Arab" typeface="Arial"/>
+        <a:font script="Hebr" typeface="Arial"/>
+        <a:font script="Thai" typeface="Cordia New"/>
+        <a:font script="Ethi" typeface="Nyala"/>
+        <a:font script="Beng" typeface="Vrinda"/>
+        <a:font script="Gujr" typeface="Shruti"/>
+        <a:font script="Khmr" typeface="DaunPenh"/>
+        <a:font script="Knda" typeface="Tunga"/>
+        <a:font script="Guru" typeface="Raavi"/>
+        <a:font script="Cans" typeface="Euphemia"/>
+        <a:font script="Cher" typeface="Plantagenet Cherokee"/>
+        <a:font script="Yiii" typeface="Microsoft Yi Baiti"/>
+        <a:font script="Tibt" typeface="Microsoft Himalaya"/>
+        <a:font script="Thaa" typeface="MV Boli"/>
+        <a:font script="Deva" typeface="Mangal"/>
+        <a:font script="Telu" typeface="Gautami"/>
+        <a:font script="Taml" typeface="Latha"/>
+        <a:font script="Syrc" typeface="Estrangelo Edessa"/>
+        <a:font script="Orya" typeface="Kalinga"/>
+        <a:font script="Mlym" typeface="Kartika"/>
+        <a:font script="Laoo" typeface="DokChampa"/>
+        <a:font script="Sinh" typeface="Iskoola Pota"/>
+        <a:font script="Mong" typeface="Mongolian Baiti"/>
+        <a:font script="Viet" typeface="Arial"/>
+        <a:font script="Uigh" typeface="Microsoft Uighur"/>
+        <a:font script="Geor" typeface="Sylfaen"/>
+        <a:font script="Armn" typeface="Arial"/>
+        <a:font script="Bugi" typeface="Leelawadee UI"/>
+        <a:font script="Bopo" typeface="Microsoft JhengHei"/>
+        <a:font script="Java" typeface="Javanese Text"/>
+        <a:font script="Lisu" typeface="Segoe UI"/>
+        <a:font script="Mymr" typeface="Myanmar Text"/>
+        <a:font script="Nkoo" typeface="Ebrima"/>
+        <a:font script="Olck" typeface="Nirmala UI"/>
+        <a:font script="Osma" typeface="Ebrima"/>
+        <a:font script="Phag" typeface="Phagspa"/>
+        <a:font script="Syrn" typeface="Estrangelo Edessa"/>
+        <a:font script="Syrj" typeface="Estrangelo Edessa"/>
+        <a:font script="Syre" typeface="Estrangelo Edessa"/>
+        <a:font script="Sora" typeface="Nirmala UI"/>
+        <a:font script="Tale" typeface="Microsoft Tai Le"/>
+        <a:font script="Talu" typeface="Microsoft New Tai Lue"/>
+        <a:font script="Tfng" typeface="Ebrima"/>
+      </a:minorFont>
+    </a:fontScheme>
+    <a:fmtScheme name="Office">
+      <a:fillStyleLst>
+        <a:solidFill>
+          <a:schemeClr val="phClr"/>
+        </a:solidFill>
+        <a:gradFill rotWithShape="1">
+          <a:gsLst>
+            <a:gs pos="0">
+              <a:schemeClr val="phClr">
+                <a:lumMod val="110000"/>
+                <a:satMod val="105000"/>
+                <a:tint val="67000"/>
+              </a:schemeClr>
+            </a:gs>
+            <a:gs pos="50000">
+              <a:schemeClr val="phClr">
+                <a:lumMod val="105000"/>
+                <a:satMod val="103000"/>
+                <a:tint val="73000"/>
+              </a:schemeClr>
+            </a:gs>
+            <a:gs pos="100000">
+              <a:schemeClr val="phClr">
+                <a:lumMod val="105000"/>
+                <a:satMod val="109000"/>
+                <a:tint val="81000"/>
+              </a:schemeClr>
+            </a:gs>
+          </a:gsLst>
+          <a:lin ang="5400000" scaled="0"/>
+        </a:gradFill>
+        <a:gradFill rotWithShape="1">
+          <a:gsLst>
+            <a:gs pos="0">
+              <a:schemeClr val="phClr">
+                <a:satMod val="103000"/>
+                <a:lumMod val="102000"/>
+                <a:tint val="94000"/>
+              </a:schemeClr>
+            </a:gs>
+            <a:gs pos="50000">
+              <a:schemeClr val="phClr">
+                <a:satMod val="110000"/>
+                <a:lumMod val="100000"/>
+                <a:shade val="100000"/>
+              </a:schemeClr>
+            </a:gs>
+            <a:gs pos="100000">
+              <a:schemeClr val="phClr">
+                <a:lumMod val="99000"/>
+                <a:satMod val="120000"/>
+                <a:shade val="78000"/>
+              </a:schemeClr>
+            </a:gs>
+          </a:gsLst>
+          <a:lin ang="5400000" scaled="0"/>
+        </a:gradFill>
+      </a:fillStyleLst>
+      <a:lnStyleLst>
+        <a:ln w="6350" cap="flat" cmpd="sng" algn="ctr">
+          <a:solidFill>
+            <a:schemeClr val="phClr"/>
+          </a:solidFill>
+          <a:prstDash val="solid"/>
+          <a:miter lim="800000"/>
+        </a:ln>
+        <a:ln w="12700" cap="flat" cmpd="sng" algn="ctr">
+          <a:solidFill>
+            <a:schemeClr val="phClr"/>
+          </a:solidFill>
+          <a:prstDash val="solid"/>
+          <a:miter lim="800000"/>
+        </a:ln>
+        <a:ln w="19050" cap="flat" cmpd="sng" algn="ctr">
+          <a:solidFill>
+            <a:schemeClr val="phClr"/>
+          </a:solidFill>
+          <a:prstDash val="solid"/>
+          <a:miter lim="800000"/>
+        </a:ln>
+      </a:lnStyleLst>
+      <a:effectStyleLst>
+        <a:effectStyle>
+          <a:effectLst/>
+        </a:effectStyle>
+        <a:effectStyle>
+          <a:effectLst/>
+        </a:effectStyle>
+        <a:effectStyle>
+          <a:effectLst>
+            <a:outerShdw blurRad="57150" dist="19050" dir="5400000" algn="ctr" rotWithShape="0">
+              <a:srgbClr val="000000">
+                <a:alpha val="63000"/>
+              </a:srgbClr>
+            </a:outerShdw>
+          </a:effectLst>
+        </a:effectStyle>
+      </a:effectStyleLst>
+      <a:bgFillStyleLst>
+        <a:solidFill>
+          <a:schemeClr val="phClr"/>
+        </a:solidFill>
+        <a:solidFill>
+          <a:schemeClr val="phClr">
+            <a:tint val="95000"/>
+            <a:satMod val="170000"/>
+          </a:schemeClr>
+        </a:solidFill>
+        <a:gradFill rotWithShape="1">
+          <a:gsLst>
+            <a:gs pos="0">
+              <a:schemeClr val="phClr">
+                <a:tint val="93000"/>
+                <a:satMod val="150000"/>
+                <a:shade val="98000"/>
+                <a:lumMod val="102000"/>
+              </a:schemeClr>
+            </a:gs>
+            <a:gs pos="50000">
+              <a:schemeClr val="phClr">
+                <a:tint val="98000"/>
+                <a:satMod val="130000"/>
+                <a:shade val="90000"/>
+                <a:lumMod val="103000"/>
+              </a:schemeClr>
+            </a:gs>
+            <a:gs pos="100000">
+              <a:schemeClr val="phClr">
+                <a:shade val="63000"/>
+                <a:satMod val="120000"/>
+              </a:schemeClr>
+            </a:gs>
+          </a:gsLst>
+          <a:lin ang="5400000" scaled="0"/>
+        </a:gradFill>
+      </a:bgFillStyleLst>
+    </a:fmtScheme>
+  </a:themeElements>
+  <a:objectDefaults/>
+  <a:extraClrSchemeLst/>
+  <a:extLst>
+    <a:ext uri="{05A4C25C-085E-4340-85A3-A5531E510DB2}">
+      <thm15:themeFamily xmlns:thm15="http://schemas.microsoft.com/office/thememl/2012/main" name="Office Theme" id="{62F939B6-93AF-4DB8-9C6B-D6C7DFDC589F}" vid="{4A3C46E8-61CC-4603-A589-7422A47A8E4A}"/>
+    </a:ext>
+  </a:extLst>
+</a:theme>
 </file>